--- a/slides/decks/s10-neutropenic-fever-bacterial.pptx
+++ b/slides/decks/s10-neutropenic-fever-bacterial.pptx
@@ -135,13 +135,13 @@
   <p:extLst>
     <p:ext uri="{521415D9-36F7-43E2-AB2F-B90AF26B5E84}">
       <p14:sectionLst xmlns:p14="http://schemas.microsoft.com/office/powerpoint/2010/main">
-        <p14:section name="Opening" id="{ee867f19-27a7-3c57-75d4-824e8222786b}">
+        <p14:section name="Opening" id="{30f76bab-4363-7b87-d052-6a77c850e48f}">
           <p14:sldIdLst>
             <p14:sldId id="256"/>
             <p14:sldId id="257"/>
           </p14:sldIdLst>
         </p14:section>
-        <p14:section name="Neutropenic fever" id="{bcdb3487-5eea-4655-d7c2-f6d6de548455}">
+        <p14:section name="Neutropenic fever" id="{660a5e24-34df-93eb-7c89-069abb8be8d0}">
           <p14:sldIdLst>
             <p14:sldId id="258"/>
             <p14:sldId id="259"/>
@@ -150,7 +150,7 @@
             <p14:sldId id="262"/>
           </p14:sldIdLst>
         </p14:section>
-        <p14:section name="Bacterial infections" id="{d2144b87-fac5-a3c2-78e9-8ade7ffe8db6}">
+        <p14:section name="Bacterial infections" id="{e9b7e1c8-0f7f-4cb1-efac-cb3c93b86ca8}">
           <p14:sldIdLst>
             <p14:sldId id="263"/>
             <p14:sldId id="264"/>
@@ -160,14 +160,14 @@
             <p14:sldId id="268"/>
           </p14:sldIdLst>
         </p14:section>
-        <p14:section name="Other life-threatening infections" id="{deb3728e-c516-a099-b2d0-190bff550995}">
+        <p14:section name="Other life-threatening infections" id="{eef66766-1504-b6cd-a8c3-8c6ae52e58b3}">
           <p14:sldIdLst>
             <p14:sldId id="269"/>
             <p14:sldId id="270"/>
             <p14:sldId id="271"/>
           </p14:sldIdLst>
         </p14:section>
-        <p14:section name="Board questions" id="{227ee79a-6b42-cf99-4651-676e381ab56a}">
+        <p14:section name="Board questions" id="{08f3e989-e120-5b6d-3e33-026dd3ddee82}">
           <p14:sldIdLst>
             <p14:sldId id="272"/>
             <p14:sldId id="273"/>
@@ -177,14 +177,14 @@
             <p14:sldId id="277"/>
           </p14:sldIdLst>
         </p14:section>
-        <p14:section name="References" id="{0bcf63ff-436b-aff4-8763-6803008578cf}">
+        <p14:section name="References" id="{38b16fe2-29dc-ecbb-553a-7076f44cff49}">
           <p14:sldIdLst>
             <p14:sldId id="278"/>
             <p14:sldId id="279"/>
             <p14:sldId id="280"/>
           </p14:sldIdLst>
         </p14:section>
-        <p14:section name="Backup" id="{83c1566c-67d0-bb2c-5c9a-ead66d4df8c4}">
+        <p14:section name="Backup" id="{dc24deca-56cd-2294-6fdd-4cc8e25a2604}">
           <p14:sldIdLst>
             <p14:sldId id="281"/>
             <p14:sldId id="282"/>
@@ -748,6 +748,17 @@
             </a:pPr>
             <a:r>
               <a:rPr lang="en-US" dirty="0"/>
+              <a:t>Carbapenem 抗藥在 Enterobacterales 中以 Klebsiella pneumoniae 最常見。這幾個新藥在免疫低下 BSI 病人的臨床資料其實很有限，而且治療中、甚至沒有暴露過也有抗藥的報告，所以藥敏結果和感染科會診很重要。新的 β-lactam 組合腎毒性明顯低於 polymyxin 或 aminoglycoside 為主的 regimen。</a:t>
+            </a:r>
+          </a:p>
+          <a:p>
+            <a:pPr>
+              <a:spcAft>
+                <a:spcPts val="600"/>
+              </a:spcAft>
+            </a:pPr>
+            <a:r>
+              <a:rPr lang="en-US" dirty="0"/>
               <a:t>對 β-lactam 敏感的菌，不建議常規合併 aminoglycoside、polymyxin 或 FQ。只剩舊藥有效的 CRE，或拿不到新藥時，才用一種以上的有效藥物。</a:t>
             </a:r>
           </a:p>
@@ -873,6 +884,17 @@
             </a:pPr>
             <a:r>
               <a:rPr lang="en-US" dirty="0"/>
+              <a:t>Carbapenem 抗藥、但對其他 non-carbapenem β-lactam 仍敏感的 PA，可以用高劑量延長輸注的 non-carbapenem β-lactam。DTR PA 的其他選擇有 imipenem-relebactam 和 ceftazidime-avibactam。對所有 β-lactam 都抗藥時，選體外抗藥程度最低的 β-lactam 合併 aminoglycoside 或 polymyxin B。</a:t>
+            </a:r>
+          </a:p>
+          <a:p>
+            <a:pPr>
+              <a:spcAft>
+                <a:spcPts val="600"/>
+              </a:spcAft>
+            </a:pPr>
+            <a:r>
+              <a:rPr lang="en-US" dirty="0"/>
               <a:t>底下這行是例外條款，neutropenic 病人的嚴重 Pseudomonas 感染，常會先合併治療到病情穩定。</a:t>
             </a:r>
           </a:p>
@@ -998,6 +1020,17 @@
             </a:pPr>
             <a:r>
               <a:rPr lang="en-US" dirty="0"/>
+              <a:t>NTM 的 CVC 感染，第 39 章也建議導管幾乎都要拔，和這張的 mycobacteria 一致。臨床上兩套血液培養要同時抽，並標清楚哪一套來自 CVC，否則 differential time to positivity 無法判讀。</a:t>
+            </a:r>
+          </a:p>
+          <a:p>
+            <a:pPr>
+              <a:spcAft>
+                <a:spcPts val="600"/>
+              </a:spcAft>
+            </a:pPr>
+            <a:r>
+              <a:rPr lang="en-US" dirty="0"/>
               <a:t>考題常給 S. aureus 或 Pseudomonas bacteremia 的病人，問要不要拔管，依這張圖答案幾乎都是要拔。</a:t>
             </a:r>
           </a:p>
@@ -1123,6 +1156,17 @@
             </a:pPr>
             <a:r>
               <a:rPr lang="en-US" dirty="0"/>
+              <a:t>要不要給 FQ prophylaxis，先看自己中心 Gram-negative 對 FQ 的抗藥率。抗藥率高時，預防效果被抵消，副作用卻全部留下。</a:t>
+            </a:r>
+          </a:p>
+          <a:p>
+            <a:pPr>
+              <a:spcAft>
+                <a:spcPts val="600"/>
+              </a:spcAft>
+            </a:pPr>
+            <a:r>
+              <a:rPr lang="en-US" dirty="0"/>
               <a:t>Day 100 以後，cGVHD 或 hypogammaglobulinemia 的病人給口服 penicillin，前提是當地抗藥率低，而且不論有沒有打過疫苗；IgG 低於 400 mg/dL 給 IVIg，再加上疫苗。</a:t>
             </a:r>
           </a:p>
@@ -1259,6 +1303,17 @@
             </a:pPr>
             <a:r>
               <a:rPr lang="en-US" dirty="0"/>
+              <a:t>移植後初次感染或再感染仍然可能，所以要避免生食任何肉類和飲用受污染的水。有在吃 TMP/SMX 預防的病人，不需要再做 qPCR 監測。Table 39.2 裡的 dapsone 100 mg 和 atovaquone 1500 mg 每天，是 TMP/SMX 的替代選擇。</a:t>
+            </a:r>
+          </a:p>
+          <a:p>
+            <a:pPr>
+              <a:spcAft>
+                <a:spcPts val="600"/>
+              </a:spcAft>
+            </a:pPr>
+            <a:r>
+              <a:rPr lang="en-US" dirty="0"/>
               <a:t>預防用 TMP/SMX，breakthrough 多半發生在一週吃不到 3 天的人，所以建議每天一顆 single-strength，或 double-strength 一週 4 天。沒有吃 TMP/SMX 的血清陽性病人，改用每週血液 qPCR 監測，類似 CMV 的 preemptive 做法。</a:t>
             </a:r>
           </a:p>
@@ -1531,6 +1586,17 @@
             </a:pPr>
             <a:r>
               <a:rPr lang="en-US" dirty="0"/>
+              <a:t>Nocardia 的培養中位數要 9 天才轉陽，最長可到 2 到 4 週，常常要靠痰或 BAL 直接看到分枝狀桿菌。</a:t>
+            </a:r>
+          </a:p>
+          <a:p>
+            <a:pPr>
+              <a:spcAft>
+                <a:spcPts val="600"/>
+              </a:spcAft>
+            </a:pPr>
+            <a:r>
+              <a:rPr lang="en-US" dirty="0"/>
               <a:t>最後一列是常見陷阱，一週兩到三天的 TMP/SMX 預防不了 Nocardia。</a:t>
             </a:r>
           </a:p>
@@ -2292,7 +2358,7 @@
             </a:pPr>
             <a:r>
               <a:rPr lang="en-US" dirty="0"/>
-              <a:t>選項包括腦部影像、兩週後重做 BAL、加 voriconazole、四合一抗結核藥，以及總共三週的療程。題目問的是除了高劑量 TMP/SMX 之外，一定要做的事。</a:t>
+              <a:t>選項包括腦部影像、兩週後重做 BAL、加 voriconazole、四合一抗結核藥，以及總共三週的療程。題目問的是除了高劑量 TMP/SMX 之外，一定要做的事。注意他的移植後時間、免疫抑制，以及 TMP/SMX 的吃法。</a:t>
             </a:r>
           </a:p>
           <a:p>
@@ -2428,6 +2494,17 @@
             </a:pPr>
             <a:r>
               <a:rPr lang="en-US" dirty="0"/>
+              <a:t>高劑量 TMP/SMX 之外，carbapenem、amikacin 和 linezolid 也有好結果。</a:t>
+            </a:r>
+          </a:p>
+          <a:p>
+            <a:pPr>
+              <a:spcAft>
+                <a:spcPts val="600"/>
+              </a:spcAft>
+            </a:pPr>
+            <a:r>
+              <a:rPr lang="en-US" dirty="0"/>
               <a:t>題幹裡一週兩天的 TMP/SMX 也是線索，2 到 3 天的排程預防不了 Nocardia，這和 PJP 預防的思維不同。</a:t>
             </a:r>
           </a:p>
@@ -3169,6 +3246,17 @@
             </a:pPr>
             <a:r>
               <a:rPr lang="en-US" dirty="0"/>
+              <a:t>臨床檢查還要看黏膜病灶和 CNS 表現，局部病灶想到黴菌或細菌膿瘍，意識混亂則可能是嚴重全身感染或病毒性腦炎。</a:t>
+            </a:r>
+          </a:p>
+          <a:p>
+            <a:pPr>
+              <a:spcAft>
+                <a:spcPts val="600"/>
+              </a:spcAft>
+            </a:pPr>
+            <a:r>
+              <a:rPr lang="en-US" dirty="0"/>
               <a:t>理學檢查要找細微的局部線索。CVC 出口紅腫想到導管感染，會陰部疼痛想到膿瘍，皮膚指甲病灶想到黴菌，腹部壓痛或腹瀉想到 neutropenic enterocolitis 或 C. difficile，流鼻水送鼻腔病毒檢測，肋膜性胸痛想到 mould。懷疑肺部時直接做 lung CT，因為 chest X-ray 在 neutropenia 的敏感度太低。</a:t>
             </a:r>
           </a:p>
@@ -3286,6 +3374,17 @@
               <a:t>沒有抗藥風險的病人走 escalation，用單一的 anti-pseudomonal β-lactam。有抗藥風險，尤其表現嚴重的，走 de-escalation，一開始就涵蓋 MDR 菌。已知 colonising strain 的病人，可以在發燒之前就依它的藥敏把 empirical 處方寫在病歷上。</a:t>
             </a:r>
           </a:p>
+          <a:p>
+            <a:pPr>
+              <a:spcAft>
+                <a:spcPts val="600"/>
+              </a:spcAft>
+            </a:pPr>
+            <a:r>
+              <a:rPr lang="en-US" dirty="0"/>
+              <a:t>這兩個評估合起來，決定抗生素的涵蓋範圍、要不要加做其他檢查，以及接下來要多密切地監測惡化徵象。抗藥風險要同時看病人自己的 colonisation、感染史，以及單位的流行病學。</a:t>
+            </a:r>
+          </a:p>
         </p:txBody>
       </p:sp>
       <p:sp>
@@ -3419,6 +3518,17 @@
             </a:pPr>
             <a:r>
               <a:rPr lang="en-US" dirty="0"/>
+              <a:t>De-escalation 原本是 ICU 重症病人的做法，後來才被提出用在 neutropenic 血液病人。Neutropenic ICU 病人和 HCT 病人的資料都顯示它安全可行，但各移植中心的實施程度並不一致。它的兩個核心，一是立刻給到對潛在致命 MDR 菌有效的治療，二是盡量減少不必要的廣效藥物，以免選出或誘發抗藥菌。</a:t>
+            </a:r>
+          </a:p>
+          <a:p>
+            <a:pPr>
+              <a:spcAft>
+                <a:spcPts val="600"/>
+              </a:spcAft>
+            </a:pPr>
+            <a:r>
+              <a:rPr lang="en-US" dirty="0"/>
               <a:t>底下這行常考。Vancomycin 這類 Gram-positive coverage，不論是起始治療或持續發燒，都不建議常規加上，除非有皮膚或 CVC 感染、肺炎，或已證實 Gram-positive 感染。Cochrane 的 Beyar-Katz 2017 也沒有看到常規加藥的效益。</a:t>
             </a:r>
           </a:p>
@@ -3772,7 +3882,7 @@
             </a:pPr>
             <a:r>
               <a:rPr lang="en-US" dirty="0"/>
-              <a:t>細菌感染最常見的是 bloodstream infection，auto-HCT 大約 5 到 10%，allo-HCT 20 到 50%，多數在 engraftment 之前。Pre-engraftment 的風險來自 neutropenia 和屏障破壞，也就是 mucositis 和血管導管，Gram-positive cocci 和 Gram-negative 都有；haplo 和 cord blood engraftment 比較慢，風險更高。</a:t>
+              <a:t>細菌感染最常見的是 bloodstream infection，auto-HCT 大約 5 到 10%，allo-HCT 20 到 50%，多數在 engraftment 之前。Pre-engraftment 的風險來自 neutropenia 和屏障破壞，也就是 mucositis 和血管導管，Gram-positive cocci 和 Gram-negative 都有，E. coli 是 engraftment 前最常見的 Gram-negative；haplo 和 cord blood engraftment 比較慢，風險更高。</a:t>
             </a:r>
           </a:p>
           <a:p>
@@ -3784,6 +3894,17 @@
             <a:r>
               <a:rPr lang="en-US" dirty="0"/>
               <a:t>Engraftment 到 day 100，主要是 CVC、免疫尚未重建，以及 GVHD 和它的治療。Day 100 以後是 humoral 和 cellular immunity 不足，要想到肺炎鏈球菌和 Haemophilus influenzae，少數是 mycobacteria、Nocardia、Listeria，這幾個在第三段再談。</a:t>
+            </a:r>
+          </a:p>
+          <a:p>
+            <a:pPr>
+              <a:spcAft>
+                <a:spcPts val="600"/>
+              </a:spcAft>
+            </a:pPr>
+            <a:r>
+              <a:rPr lang="en-US" dirty="0"/>
+              <a:t>BSI 死亡的危險因子包括年紀大、steroid、持續 neutropenia、休克、MDR 菌，以及不適當的 empirical 治療。</a:t>
             </a:r>
           </a:p>
         </p:txBody>
@@ -3909,6 +4030,17 @@
             <a:r>
               <a:rPr lang="en-US" dirty="0"/>
               <a:t>Enterococci 佔 4 到 24%，較晚發生，E. faecium 比 E. faecalis 多。VRE 的危險因子是 colonisation、mucositis 和廣效抗生素，常見於狀況差、合併 GVHD 的病人，這也解釋了為什麼 empirical 涵蓋 VRE 沒有降低死亡率。VRE 用 linezolid 或 daptomycin，也可以 daptomycin 合併 ampicillin、ceftriaxone 或 ceftaroline。</a:t>
+            </a:r>
+          </a:p>
+          <a:p>
+            <a:pPr>
+              <a:spcAft>
+                <a:spcPts val="600"/>
+              </a:spcAft>
+            </a:pPr>
+            <a:r>
+              <a:rPr lang="en-US" dirty="0"/>
+              <a:t>MRSA 也有 vancomycin 敏感性下降的 VISA，部分菌株同時對 daptomycin 不敏感；其他有特定適應症的藥物還有 ceftaroline、lipoglycopeptide、delafloxacin 和 linezolid。</a:t>
             </a:r>
           </a:p>
           <a:p>

--- a/slides/decks/s10-neutropenic-fever-bacterial.pptx
+++ b/slides/decks/s10-neutropenic-fever-bacterial.pptx
@@ -33,10 +33,9 @@
     <p:sldId id="281" r:id="rId27"/>
     <p:sldId id="282" r:id="rId28"/>
     <p:sldId id="283" r:id="rId29"/>
-    <p:sldId id="284" r:id="rId30"/>
   </p:sldIdLst>
   <p:notesMasterIdLst>
-    <p:notesMasterId r:id="rId31"/>
+    <p:notesMasterId r:id="rId30"/>
   </p:notesMasterIdLst>
   <p:sldSz cx="12192000" cy="6858000"/>
   <p:notesSz cx="6858000" cy="12192000"/>
@@ -135,13 +134,13 @@
   <p:extLst>
     <p:ext uri="{521415D9-36F7-43E2-AB2F-B90AF26B5E84}">
       <p14:sectionLst xmlns:p14="http://schemas.microsoft.com/office/powerpoint/2010/main">
-        <p14:section name="Opening" id="{30f76bab-4363-7b87-d052-6a77c850e48f}">
+        <p14:section name="Opening" id="{71b2f0eb-35c3-17d3-15b3-78be74174ff7}">
           <p14:sldIdLst>
             <p14:sldId id="256"/>
             <p14:sldId id="257"/>
           </p14:sldIdLst>
         </p14:section>
-        <p14:section name="Neutropenic fever" id="{660a5e24-34df-93eb-7c89-069abb8be8d0}">
+        <p14:section name="Neutropenic fever" id="{0ac17183-8122-06c1-134c-a672696eb116}">
           <p14:sldIdLst>
             <p14:sldId id="258"/>
             <p14:sldId id="259"/>
@@ -150,7 +149,7 @@
             <p14:sldId id="262"/>
           </p14:sldIdLst>
         </p14:section>
-        <p14:section name="Bacterial infections" id="{e9b7e1c8-0f7f-4cb1-efac-cb3c93b86ca8}">
+        <p14:section name="Bacterial infections" id="{9160de3c-65b4-ca58-3c79-5c3c72f898cf}">
           <p14:sldIdLst>
             <p14:sldId id="263"/>
             <p14:sldId id="264"/>
@@ -160,14 +159,14 @@
             <p14:sldId id="268"/>
           </p14:sldIdLst>
         </p14:section>
-        <p14:section name="Other life-threatening infections" id="{eef66766-1504-b6cd-a8c3-8c6ae52e58b3}">
+        <p14:section name="Other life-threatening infections" id="{babd1133-0d2a-d6f5-9a5f-2d4c4ac89f83}">
           <p14:sldIdLst>
             <p14:sldId id="269"/>
             <p14:sldId id="270"/>
             <p14:sldId id="271"/>
           </p14:sldIdLst>
         </p14:section>
-        <p14:section name="Board questions" id="{08f3e989-e120-5b6d-3e33-026dd3ddee82}">
+        <p14:section name="Board questions" id="{8f4b7143-47bd-2e4c-86bc-ed8d1d323080}">
           <p14:sldIdLst>
             <p14:sldId id="272"/>
             <p14:sldId id="273"/>
@@ -177,19 +176,18 @@
             <p14:sldId id="277"/>
           </p14:sldIdLst>
         </p14:section>
-        <p14:section name="References" id="{38b16fe2-29dc-ecbb-553a-7076f44cff49}">
+        <p14:section name="References" id="{fa47d299-28a9-32fb-ea17-159fa5a8bfe4}">
           <p14:sldIdLst>
             <p14:sldId id="278"/>
             <p14:sldId id="279"/>
-            <p14:sldId id="280"/>
           </p14:sldIdLst>
         </p14:section>
-        <p14:section name="Backup" id="{dc24deca-56cd-2294-6fdd-4cc8e25a2604}">
+        <p14:section name="Backup" id="{0d27e10d-34ed-1b06-dbc5-6f15c4b5205b}">
           <p14:sldIdLst>
+            <p14:sldId id="280"/>
             <p14:sldId id="281"/>
             <p14:sldId id="282"/>
             <p14:sldId id="283"/>
-            <p14:sldId id="284"/>
           </p14:sldIdLst>
         </p14:section>
       </p14:sectionLst>
@@ -715,7 +713,7 @@
             </a:pPr>
             <a:r>
               <a:rPr lang="en-US" dirty="0"/>
-              <a:t>先看底下這行數字。EBMT 的多國前瞻性研究裡，一半的 Gram-negative 對 non-carbapenem β-lactam 抗藥，而這正是 febrile neutropenia 的 first-line；18.5% 對 carbapenem 抗藥，35% 是 MDR。Allo 比 auto 高，東南歐比西北歐高。Carbapenem-resistant 的危險因子是同一種菌的 colonisation 或感染、carbapenem 治療中 breakthrough，以及住過 ICU。</a:t>
+              <a:t>標題的數字來自 EBMT 的多國前瞻性研究裡，一半的 Gram-negative 對 non-carbapenem β-lactam 抗藥，而這正是 febrile neutropenia 的 first-line；18.5% 對 carbapenem 抗藥，35% 是 MDR。Allo 比 auto 高，東南歐比西北歐高。Carbapenem-resistant 的危險因子是同一種菌的 colonisation 或感染、carbapenem 治療中 breakthrough，以及住過 ICU。</a:t>
             </a:r>
           </a:p>
           <a:p>
@@ -2768,7 +2766,7 @@
           <a:p>
             <a:r>
               <a:rPr lang="en-US" dirty="0"/>
-              <a:t>各頁頁尾短式引用的完整文獻，不講。</a:t>
+              <a:t>Neutropenic fever 的鑑別診斷很廣，包括病毒、黴菌等非細菌感染，以及 ATG、輸血反應、CRS、mucositis、engraftment syndrome、GVHD、rejection、haemophagocytosis 和原本疾病。但在排除之前，仍然先當 Gram-negative bacteremia 處理。</a:t>
             </a:r>
             <a:endParaRPr lang="en-US" dirty="0"/>
           </a:p>
@@ -2856,7 +2854,7 @@
           <a:p>
             <a:r>
               <a:rPr lang="en-US" dirty="0"/>
-              <a:t>Neutropenic fever 的鑑別診斷很廣，包括病毒、黴菌等非細菌感染，以及 ATG、輸血反應、CRS、mucositis、engraftment syndrome、GVHD、rejection、haemophagocytosis 和原本疾病。但在排除之前，仍然先當 Gram-negative bacteremia 處理。</a:t>
+              <a:t>Pneumonia 發生在 11 到 24% 的病人，低血氧可能是唯一表現，要立刻做 chest CT、可行時做 bronchoscopy，並開始 empirical 治療。CDI 診斷用 GDH EIA、NAAT 和 toxin EIA 組合。懷疑細菌性腦膜炎時，empirical 用 cefotaxime 或 ceftriaxone 加 ampicillin，依當地肺炎鏈球菌抗藥率考慮加 vancomycin。</a:t>
             </a:r>
             <a:endParaRPr lang="en-US" dirty="0"/>
           </a:p>
@@ -2944,7 +2942,7 @@
           <a:p>
             <a:r>
               <a:rPr lang="en-US" dirty="0"/>
-              <a:t>Pneumonia 發生在 11 到 24% 的病人，低血氧可能是唯一表現，要立刻做 chest CT、可行時做 bronchoscopy，並開始 empirical 治療。CDI 診斷用 GDH EIA、NAAT 和 toxin EIA 組合。懷疑細菌性腦膜炎時，empirical 用 cefotaxime 或 ceftriaxone 加 ampicillin，依當地肺炎鏈球菌抗藥率考慮加 vancomycin。</a:t>
+              <a:t>第 36 章的處理原則。病人不穩或有抗藥菌 colonisation 時先用廣效，之後降階；targeted therapy 用最窄、毒性最低的有效藥物。β-lactam 先給 loading dose 再延長或持續輸注，死亡率和治療中產生抗藥都比較低。療程至少 7 天，退燒至少 4 天。</a:t>
             </a:r>
             <a:endParaRPr lang="en-US" dirty="0"/>
           </a:p>
@@ -3032,7 +3030,7 @@
           <a:p>
             <a:r>
               <a:rPr lang="en-US" dirty="0"/>
-              <a:t>第 36 章的處理原則。病人不穩或有抗藥菌 colonisation 時先用廣效，之後降階；targeted therapy 用最窄、毒性最低的有效藥物。β-lactam 先給 loading dose 再延長或持續輸注，死亡率和治療中產生抗藥都比較低。療程至少 7 天，退燒至少 4 天。</a:t>
+              <a:t>這是 Table 39.3 的節錄。三個台灣系列中，allo-HCT 後 TB 的風險是一般人的 7 到 13.1 倍，Fan 2015 的 auto 也有 2.5 倍，和歐洲 auto 不增加的資料不同。Liu 2016 的摘要則是 NTM 多於 TB。</a:t>
             </a:r>
             <a:endParaRPr lang="en-US" dirty="0"/>
           </a:p>
@@ -3056,94 +3054,6 @@
             <a:fld id="{F7021451-1387-4CA6-816F-3879F97B5CBC}" type="slidenum">
               <a:rPr lang="en-US"/>
               <a:t>28</a:t>
-            </a:fld>
-            <a:endParaRPr lang="en-US"/>
-          </a:p>
-        </p:txBody>
-      </p:sp>
-    </p:spTree>
-    <p:extLst>
-      <p:ext uri="{BB962C8B-B14F-4D97-AF65-F5344CB8AC3E}">
-        <p14:creationId xmlns:p14="http://schemas.microsoft.com/office/powerpoint/2010/main" val="1024086991"/>
-      </p:ext>
-    </p:extLst>
-  </p:cSld>
-  <p:clrMapOvr>
-    <a:masterClrMapping/>
-  </p:clrMapOvr>
-</p:notes>
-</file>
-
-<file path=ppt/notesSlides/notesSlide29.xml><?xml version="1.0" encoding="utf-8"?>
-<p:notes xmlns:a="http://schemas.openxmlformats.org/drawingml/2006/main" xmlns:r="http://schemas.openxmlformats.org/officeDocument/2006/relationships" xmlns:p="http://schemas.openxmlformats.org/presentationml/2006/main">
-  <p:cSld>
-    <p:spTree>
-      <p:nvGrpSpPr>
-        <p:cNvPr id="1" name=""/>
-        <p:cNvGrpSpPr/>
-        <p:nvPr/>
-      </p:nvGrpSpPr>
-      <p:grpSpPr>
-        <a:xfrm>
-          <a:off x="0" y="0"/>
-          <a:ext cx="0" cy="0"/>
-          <a:chOff x="0" y="0"/>
-          <a:chExt cx="0" cy="0"/>
-        </a:xfrm>
-      </p:grpSpPr>
-      <p:sp>
-        <p:nvSpPr>
-          <p:cNvPr id="2" name="Slide Image Placeholder 1"/>
-          <p:cNvSpPr>
-            <a:spLocks noGrp="1" noRot="1" noChangeAspect="1"/>
-          </p:cNvSpPr>
-          <p:nvPr>
-            <p:ph type="sldImg"/>
-          </p:nvPr>
-        </p:nvSpPr>
-        <p:spPr/>
-      </p:sp>
-      <p:sp>
-        <p:nvSpPr>
-          <p:cNvPr id="3" name="Notes Placeholder 2"/>
-          <p:cNvSpPr>
-            <a:spLocks noGrp="1"/>
-          </p:cNvSpPr>
-          <p:nvPr>
-            <p:ph type="body" idx="1"/>
-          </p:nvPr>
-        </p:nvSpPr>
-        <p:spPr/>
-        <p:txBody>
-          <a:bodyPr/>
-          <a:lstStyle/>
-          <a:p>
-            <a:r>
-              <a:rPr lang="en-US" dirty="0"/>
-              <a:t>這是 Table 39.3 的節錄。三個台灣系列中，allo-HCT 後 TB 的風險是一般人的 7 到 13.1 倍，Fan 2015 的 auto 也有 2.5 倍，和歐洲 auto 不增加的資料不同。Liu 2016 的摘要則是 NTM 多於 TB。</a:t>
-            </a:r>
-            <a:endParaRPr lang="en-US" dirty="0"/>
-          </a:p>
-        </p:txBody>
-      </p:sp>
-      <p:sp>
-        <p:nvSpPr>
-          <p:cNvPr id="4" name="Slide Number Placeholder 3"/>
-          <p:cNvSpPr>
-            <a:spLocks noGrp="1"/>
-          </p:cNvSpPr>
-          <p:nvPr>
-            <p:ph type="sldNum" sz="quarter" idx="10"/>
-          </p:nvPr>
-        </p:nvSpPr>
-        <p:spPr/>
-        <p:txBody>
-          <a:bodyPr/>
-          <a:lstStyle/>
-          <a:p>
-            <a:fld id="{F7021451-1387-4CA6-816F-3879F97B5CBC}" type="slidenum">
-              <a:rPr lang="en-US"/>
-              <a:t>29</a:t>
             </a:fld>
             <a:endParaRPr lang="en-US"/>
           </a:p>
@@ -5403,7 +5313,7 @@
                   <a:schemeClr val="tx1"/>
                 </a:solidFill>
               </a:rPr>
-              <a:t>The β-lactamase type picks the drug for Enterobacterales</a:t>
+              <a:t>Half of GNB resist first-line β-lactams; the enzyme picks the drug</a:t>
             </a:r>
             <a:endParaRPr lang="en-US" sz="3600" dirty="0"/>
           </a:p>
@@ -6478,42 +6388,6 @@
       </p:graphicFrame>
       <p:sp>
         <p:nvSpPr>
-          <p:cNvPr id="7" name="Text 55"/>
-          <p:cNvSpPr txBox="1"/>
-          <p:nvPr/>
-        </p:nvSpPr>
-        <p:spPr>
-          <a:xfrm>
-            <a:off x="685800" y="5440680"/>
-            <a:ext cx="10817352" cy="411480"/>
-          </a:xfrm>
-          <a:prstGeom prst="rect">
-            <a:avLst/>
-          </a:prstGeom>
-          <a:noFill/>
-          <a:ln/>
-        </p:spPr>
-        <p:txBody>
-          <a:bodyPr wrap="square" lIns="0" tIns="0" rIns="0" bIns="0" rtlCol="0" anchor="t"/>
-          <a:lstStyle/>
-          <a:p>
-            <a:pPr indent="0" marL="0">
-              <a:buNone/>
-            </a:pPr>
-            <a:r>
-              <a:rPr lang="en-US" sz="1600" b="1" dirty="0">
-                <a:solidFill>
-                  <a:schemeClr val="tx1"/>
-                </a:solidFill>
-              </a:rPr>
-              <a:t>EBMT study (Averbuch 2017): GNB 50% resistant to non-carbapenem β-lactams, 18.5% CR, 35% MDR</a:t>
-            </a:r>
-            <a:endParaRPr lang="en-US" sz="1600" dirty="0"/>
-          </a:p>
-        </p:txBody>
-      </p:sp>
-      <p:sp>
-        <p:nvSpPr>
           <p:cNvPr id="25" name="Slide Number Placeholder 0"/>
           <p:cNvSpPr>
             <a:spLocks noGrp="1"/>
@@ -6698,7 +6572,7 @@
       </p:sp>
       <p:graphicFrame>
         <p:nvGraphicFramePr>
-          <p:cNvPr id="12" name="Table 56"/>
+          <p:cNvPr id="12" name="Table 55"/>
           <p:cNvGraphicFramePr>
             <a:graphicFrameLocks noGrp="1"/>
           </p:cNvGraphicFramePr>
@@ -7455,13 +7329,13 @@
       </p:graphicFrame>
       <p:sp>
         <p:nvSpPr>
-          <p:cNvPr id="7" name="Text 57"/>
+          <p:cNvPr id="7" name="Text 56"/>
           <p:cNvSpPr txBox="1"/>
           <p:nvPr/>
         </p:nvSpPr>
         <p:spPr>
           <a:xfrm>
-            <a:off x="685800" y="4846320"/>
+            <a:off x="685800" y="5166360"/>
             <a:ext cx="10817352" cy="411480"/>
           </a:xfrm>
           <a:prstGeom prst="rect">
@@ -7675,7 +7549,7 @@
       </p:sp>
       <p:sp>
         <p:nvSpPr>
-          <p:cNvPr id="6" name="Box 58"/>
+          <p:cNvPr id="6" name="Box 57"/>
           <p:cNvSpPr txBox="1"/>
           <p:nvPr/>
         </p:nvSpPr>
@@ -7787,7 +7661,7 @@
       </p:sp>
       <p:sp>
         <p:nvSpPr>
-          <p:cNvPr id="10" name="Text 59"/>
+          <p:cNvPr id="10" name="Text 58"/>
           <p:cNvSpPr txBox="1"/>
           <p:nvPr/>
         </p:nvSpPr>
@@ -7825,7 +7699,7 @@
       </p:sp>
       <p:sp>
         <p:nvSpPr>
-          <p:cNvPr id="11" name="Box 60"/>
+          <p:cNvPr id="11" name="Box 59"/>
           <p:cNvSpPr txBox="1"/>
           <p:nvPr/>
         </p:nvSpPr>
@@ -7891,7 +7765,7 @@
       </p:sp>
       <p:sp>
         <p:nvSpPr>
-          <p:cNvPr id="13" name="Box 61"/>
+          <p:cNvPr id="13" name="Box 60"/>
           <p:cNvSpPr txBox="1"/>
           <p:nvPr/>
         </p:nvSpPr>
@@ -7957,7 +7831,7 @@
       </p:sp>
       <p:sp>
         <p:nvSpPr>
-          <p:cNvPr id="15" name="Text 62"/>
+          <p:cNvPr id="15" name="Text 61"/>
           <p:cNvSpPr txBox="1"/>
           <p:nvPr/>
         </p:nvSpPr>
@@ -7995,7 +7869,7 @@
       </p:sp>
       <p:sp>
         <p:nvSpPr>
-          <p:cNvPr id="16" name="Box 63"/>
+          <p:cNvPr id="16" name="Box 62"/>
           <p:cNvSpPr txBox="1"/>
           <p:nvPr/>
         </p:nvSpPr>
@@ -8061,7 +7935,7 @@
       </p:sp>
       <p:sp>
         <p:nvSpPr>
-          <p:cNvPr id="18" name="Box 64"/>
+          <p:cNvPr id="18" name="Box 63"/>
           <p:cNvSpPr txBox="1"/>
           <p:nvPr/>
         </p:nvSpPr>
@@ -8127,7 +8001,7 @@
       </p:sp>
       <p:sp>
         <p:nvSpPr>
-          <p:cNvPr id="20" name="Text 65"/>
+          <p:cNvPr id="20" name="Text 64"/>
           <p:cNvSpPr txBox="1"/>
           <p:nvPr/>
         </p:nvSpPr>
@@ -8165,7 +8039,7 @@
       </p:sp>
       <p:sp>
         <p:nvSpPr>
-          <p:cNvPr id="21" name="Box 66"/>
+          <p:cNvPr id="21" name="Box 65"/>
           <p:cNvSpPr txBox="1"/>
           <p:nvPr/>
         </p:nvSpPr>
@@ -8231,7 +8105,7 @@
       </p:sp>
       <p:sp>
         <p:nvSpPr>
-          <p:cNvPr id="23" name="Box 67"/>
+          <p:cNvPr id="23" name="Box 66"/>
           <p:cNvSpPr txBox="1"/>
           <p:nvPr/>
         </p:nvSpPr>
@@ -8297,7 +8171,7 @@
       </p:sp>
       <p:sp>
         <p:nvSpPr>
-          <p:cNvPr id="25" name="Text 68"/>
+          <p:cNvPr id="25" name="Text 67"/>
           <p:cNvSpPr txBox="1"/>
           <p:nvPr/>
         </p:nvSpPr>
@@ -8335,7 +8209,7 @@
       </p:sp>
       <p:sp>
         <p:nvSpPr>
-          <p:cNvPr id="26" name="Box 69"/>
+          <p:cNvPr id="26" name="Box 68"/>
           <p:cNvSpPr txBox="1"/>
           <p:nvPr/>
         </p:nvSpPr>
@@ -8401,7 +8275,7 @@
       </p:sp>
       <p:sp>
         <p:nvSpPr>
-          <p:cNvPr id="28" name="Box 70"/>
+          <p:cNvPr id="28" name="Box 69"/>
           <p:cNvSpPr txBox="1"/>
           <p:nvPr/>
         </p:nvSpPr>
@@ -8627,7 +8501,7 @@
       </p:sp>
       <p:graphicFrame>
         <p:nvGraphicFramePr>
-          <p:cNvPr id="14" name="Table 71"/>
+          <p:cNvPr id="14" name="Table 70"/>
           <p:cNvGraphicFramePr>
             <a:graphicFrameLocks noGrp="1"/>
           </p:cNvGraphicFramePr>
@@ -9509,7 +9383,7 @@
       </p:sp>
       <p:graphicFrame>
         <p:nvGraphicFramePr>
-          <p:cNvPr id="15" name="Table 72"/>
+          <p:cNvPr id="15" name="Table 71"/>
           <p:cNvGraphicFramePr>
             <a:graphicFrameLocks noGrp="1"/>
           </p:cNvGraphicFramePr>
@@ -10391,7 +10265,7 @@
       </p:sp>
       <p:graphicFrame>
         <p:nvGraphicFramePr>
-          <p:cNvPr id="16" name="Table 73"/>
+          <p:cNvPr id="16" name="Table 72"/>
           <p:cNvGraphicFramePr>
             <a:graphicFrameLocks noGrp="1"/>
           </p:cNvGraphicFramePr>
@@ -11488,7 +11362,7 @@
       </p:sp>
       <p:graphicFrame>
         <p:nvGraphicFramePr>
-          <p:cNvPr id="17" name="Table 74"/>
+          <p:cNvPr id="17" name="Table 73"/>
           <p:cNvGraphicFramePr>
             <a:graphicFrameLocks noGrp="1"/>
           </p:cNvGraphicFramePr>
@@ -12359,13 +12233,13 @@
       </p:graphicFrame>
       <p:sp>
         <p:nvSpPr>
-          <p:cNvPr id="7" name="Text 75"/>
+          <p:cNvPr id="7" name="Text 74"/>
           <p:cNvSpPr txBox="1"/>
           <p:nvPr/>
         </p:nvSpPr>
         <p:spPr>
           <a:xfrm>
-            <a:off x="685800" y="5349240"/>
+            <a:off x="685800" y="5486400"/>
             <a:ext cx="10817352" cy="411480"/>
           </a:xfrm>
           <a:prstGeom prst="rect">
@@ -12579,7 +12453,7 @@
       </p:sp>
       <p:sp>
         <p:nvSpPr>
-          <p:cNvPr id="6" name="Text 76"/>
+          <p:cNvPr id="6" name="Text 75"/>
           <p:cNvSpPr txBox="1"/>
           <p:nvPr/>
         </p:nvSpPr>
@@ -12615,7 +12489,7 @@
       </p:sp>
       <p:sp>
         <p:nvSpPr>
-          <p:cNvPr id="7" name="Text 77"/>
+          <p:cNvPr id="7" name="Text 76"/>
           <p:cNvSpPr txBox="1"/>
           <p:nvPr/>
         </p:nvSpPr>
@@ -12906,7 +12780,7 @@
       </p:sp>
       <p:sp>
         <p:nvSpPr>
-          <p:cNvPr id="6" name="Box 78"/>
+          <p:cNvPr id="6" name="Box 77"/>
           <p:cNvSpPr txBox="1"/>
           <p:nvPr/>
         </p:nvSpPr>
@@ -12948,7 +12822,7 @@
       </p:sp>
       <p:sp>
         <p:nvSpPr>
-          <p:cNvPr id="7" name="Text 79"/>
+          <p:cNvPr id="7" name="Text 78"/>
           <p:cNvSpPr txBox="1"/>
           <p:nvPr/>
         </p:nvSpPr>
@@ -13168,7 +13042,7 @@
       </p:sp>
       <p:sp>
         <p:nvSpPr>
-          <p:cNvPr id="6" name="Text 80"/>
+          <p:cNvPr id="6" name="Text 79"/>
           <p:cNvSpPr txBox="1"/>
           <p:nvPr/>
         </p:nvSpPr>
@@ -13204,7 +13078,7 @@
       </p:sp>
       <p:sp>
         <p:nvSpPr>
-          <p:cNvPr id="7" name="Text 81"/>
+          <p:cNvPr id="7" name="Text 80"/>
           <p:cNvSpPr txBox="1"/>
           <p:nvPr/>
         </p:nvSpPr>
@@ -14336,7 +14210,7 @@
       </p:sp>
       <p:sp>
         <p:nvSpPr>
-          <p:cNvPr id="6" name="Box 82"/>
+          <p:cNvPr id="6" name="Box 81"/>
           <p:cNvSpPr txBox="1"/>
           <p:nvPr/>
         </p:nvSpPr>
@@ -14378,7 +14252,7 @@
       </p:sp>
       <p:sp>
         <p:nvSpPr>
-          <p:cNvPr id="7" name="Text 83"/>
+          <p:cNvPr id="7" name="Text 82"/>
           <p:cNvSpPr txBox="1"/>
           <p:nvPr/>
         </p:nvSpPr>
@@ -14598,7 +14472,7 @@
       </p:sp>
       <p:sp>
         <p:nvSpPr>
-          <p:cNvPr id="6" name="Text 84"/>
+          <p:cNvPr id="6" name="Text 83"/>
           <p:cNvSpPr txBox="1"/>
           <p:nvPr/>
         </p:nvSpPr>
@@ -14634,7 +14508,7 @@
       </p:sp>
       <p:sp>
         <p:nvSpPr>
-          <p:cNvPr id="7" name="Text 85"/>
+          <p:cNvPr id="7" name="Text 84"/>
           <p:cNvSpPr txBox="1"/>
           <p:nvPr/>
         </p:nvSpPr>
@@ -14925,7 +14799,7 @@
       </p:sp>
       <p:sp>
         <p:nvSpPr>
-          <p:cNvPr id="6" name="Box 86"/>
+          <p:cNvPr id="6" name="Box 85"/>
           <p:cNvSpPr txBox="1"/>
           <p:nvPr/>
         </p:nvSpPr>
@@ -14967,7 +14841,7 @@
       </p:sp>
       <p:sp>
         <p:nvSpPr>
-          <p:cNvPr id="7" name="Text 87"/>
+          <p:cNvPr id="7" name="Text 86"/>
           <p:cNvSpPr txBox="1"/>
           <p:nvPr/>
         </p:nvSpPr>
@@ -15141,7 +15015,7 @@
                   <a:schemeClr val="tx1"/>
                 </a:solidFill>
               </a:rPr>
-              <a:t>References, part 1 of 3</a:t>
+              <a:t>References, part 1 of 2</a:t>
             </a:r>
             <a:endParaRPr lang="en-US" sz="3600" dirty="0"/>
           </a:p>
@@ -15149,7 +15023,7 @@
       </p:sp>
       <p:sp>
         <p:nvSpPr>
-          <p:cNvPr id="5" name="Text 88"/>
+          <p:cNvPr id="5" name="Text 87"/>
           <p:cNvSpPr txBox="1"/>
           <p:nvPr/>
         </p:nvSpPr>
@@ -15218,11 +15092,28 @@
             </a:r>
             <a:endParaRPr lang="en-US" sz="1100" dirty="0"/>
           </a:p>
-        </p:txBody>
-      </p:sp>
-      <p:sp>
-        <p:nvSpPr>
-          <p:cNvPr id="6" name="Text 89"/>
+          <a:p>
+            <a:pPr indent="0" marL="0">
+              <a:spcAft>
+                <a:spcPts val="700"/>
+              </a:spcAft>
+              <a:buNone/>
+            </a:pPr>
+            <a:r>
+              <a:rPr lang="en-US" sz="1100" dirty="0">
+                <a:solidFill>
+                  <a:schemeClr val="tx1"/>
+                </a:solidFill>
+              </a:rPr>
+              <a:t>4. Averbuch D, Orasch C, Cordonnier C. ECIL4, a joint venture of EBMT, EORTC, ICHS, ESGICH/ESCMID and ELN, et al. European guidelines for empirical antibacterial therapy for febrile neutropenic patients in the era of growing resistance: summary of the 2011 4th European conference on infections in leukemia. Haematologica. 2013;98:1826–35.</a:t>
+            </a:r>
+            <a:endParaRPr lang="en-US" sz="1100" dirty="0"/>
+          </a:p>
+        </p:txBody>
+      </p:sp>
+      <p:sp>
+        <p:nvSpPr>
+          <p:cNvPr id="6" name="Text 88"/>
           <p:cNvSpPr txBox="1"/>
           <p:nvPr/>
         </p:nvSpPr>
@@ -15253,23 +15144,6 @@
                   <a:schemeClr val="tx1"/>
                 </a:solidFill>
               </a:rPr>
-              <a:t>4. Averbuch D, Orasch C, Cordonnier C. ECIL4, a joint venture of EBMT, EORTC, ICHS, ESGICH/ESCMID and ELN, et al. European guidelines for empirical antibacterial therapy for febrile neutropenic patients in the era of growing resistance: summary of the 2011 4th European conference on infections in leukemia. Haematologica. 2013;98:1826–35.</a:t>
-            </a:r>
-            <a:endParaRPr lang="en-US" sz="1100" dirty="0"/>
-          </a:p>
-          <a:p>
-            <a:pPr indent="0" marL="0">
-              <a:spcAft>
-                <a:spcPts val="700"/>
-              </a:spcAft>
-              <a:buNone/>
-            </a:pPr>
-            <a:r>
-              <a:rPr lang="en-US" sz="1100" dirty="0">
-                <a:solidFill>
-                  <a:schemeClr val="tx1"/>
-                </a:solidFill>
-              </a:rPr>
               <a:t>5. Lehrnbecher T, Robinson PD, Ammann RA, et al. Guideline for the Management of Fever and Neutropenia in pediatric patients with cancer and hematopoietic cell transplantation recipients: 2023 update. J Clin Oncol. 2023;41(9):1774–85.</a:t>
             </a:r>
             <a:endParaRPr lang="en-US" sz="1100" dirty="0"/>
@@ -15288,6 +15162,23 @@
                 </a:solidFill>
               </a:rPr>
               <a:t>6. Aguilar-Guisado M, Espigado I, Martín-Peña A, et al. Optimisation of empirical antimicrobial therapy in patients with haematological malignancies and febrile neutropenia (how long study): an open-label, randomised, controlled phase 4 trial. Lancet Haematol. 2017;4:e573–83.</a:t>
+            </a:r>
+            <a:endParaRPr lang="en-US" sz="1100" dirty="0"/>
+          </a:p>
+          <a:p>
+            <a:pPr indent="0" marL="0">
+              <a:spcAft>
+                <a:spcPts val="700"/>
+              </a:spcAft>
+              <a:buNone/>
+            </a:pPr>
+            <a:r>
+              <a:rPr lang="en-US" sz="1100" dirty="0">
+                <a:solidFill>
+                  <a:schemeClr val="tx1"/>
+                </a:solidFill>
+              </a:rPr>
+              <a:t>7. de Jonge NA, Sikkens JJ, Zweegman S, et al. Short versus extended treatment with a carbapenem in patients with high-risk fever of unknown origin during neutropenia: a non-inferiority, open-label, multicentre, randomised trial. Lancet Haematol. 2022;9(8):e563–72.</a:t>
             </a:r>
             <a:endParaRPr lang="en-US" sz="1100" dirty="0"/>
           </a:p>
@@ -15463,7 +15354,7 @@
                   <a:schemeClr val="tx1"/>
                 </a:solidFill>
               </a:rPr>
-              <a:t>References, part 2 of 3</a:t>
+              <a:t>References, part 2 of 2</a:t>
             </a:r>
             <a:endParaRPr lang="en-US" sz="3600" dirty="0"/>
           </a:p>
@@ -15471,7 +15362,7 @@
       </p:sp>
       <p:sp>
         <p:nvSpPr>
-          <p:cNvPr id="5" name="Text 90"/>
+          <p:cNvPr id="5" name="Text 89"/>
           <p:cNvSpPr txBox="1"/>
           <p:nvPr/>
         </p:nvSpPr>
@@ -15502,23 +15393,6 @@
                   <a:schemeClr val="tx1"/>
                 </a:solidFill>
               </a:rPr>
-              <a:t>7. de Jonge NA, Sikkens JJ, Zweegman S, et al. Short versus extended treatment with a carbapenem in patients with high-risk fever of unknown origin during neutropenia: a non-inferiority, open-label, multicentre, randomised trial. Lancet Haematol. 2022;9(8):e563–72.</a:t>
-            </a:r>
-            <a:endParaRPr lang="en-US" sz="1100" dirty="0"/>
-          </a:p>
-          <a:p>
-            <a:pPr indent="0" marL="0">
-              <a:spcAft>
-                <a:spcPts val="700"/>
-              </a:spcAft>
-              <a:buNone/>
-            </a:pPr>
-            <a:r>
-              <a:rPr lang="en-US" sz="1100" dirty="0">
-                <a:solidFill>
-                  <a:schemeClr val="tx1"/>
-                </a:solidFill>
-              </a:rPr>
               <a:t>8. Maertens J, Lodewyck T, Donnelly JP, et al. Empiric vs preemptive antifungal strategy in high-risk neutropenic patients on fluconazole prophylaxis: a randomized trial of the European Organization for Research and Treatment of cancer. Clin Infect Dis. 2023;76(4):674–82.</a:t>
             </a:r>
             <a:endParaRPr lang="en-US" sz="1100" dirty="0"/>
@@ -15540,11 +15414,45 @@
             </a:r>
             <a:endParaRPr lang="en-US" sz="1100" dirty="0"/>
           </a:p>
-        </p:txBody>
-      </p:sp>
-      <p:sp>
-        <p:nvSpPr>
-          <p:cNvPr id="6" name="Text 91"/>
+          <a:p>
+            <a:pPr indent="0" marL="0">
+              <a:spcAft>
+                <a:spcPts val="700"/>
+              </a:spcAft>
+              <a:buNone/>
+            </a:pPr>
+            <a:r>
+              <a:rPr lang="en-US" sz="1100" dirty="0">
+                <a:solidFill>
+                  <a:schemeClr val="tx1"/>
+                </a:solidFill>
+              </a:rPr>
+              <a:t>10. Averbuch D, Tridello G, Hoek J, et al. Antimicrobial resistance in gram-negative rods causing bacteremia in hematopoietic stem cell transplant recipients: intercontinental prospective study of the infectious diseases working Party of the European Bone Marrow Transplantation Group. Clin Infect Dis. 2017;65(11):1819–28.</a:t>
+            </a:r>
+            <a:endParaRPr lang="en-US" sz="1100" dirty="0"/>
+          </a:p>
+          <a:p>
+            <a:pPr indent="0" marL="0">
+              <a:spcAft>
+                <a:spcPts val="700"/>
+              </a:spcAft>
+              <a:buNone/>
+            </a:pPr>
+            <a:r>
+              <a:rPr lang="en-US" sz="1100" dirty="0">
+                <a:solidFill>
+                  <a:schemeClr val="tx1"/>
+                </a:solidFill>
+              </a:rPr>
+              <a:t>11. Mikulska M, Averbuch D, Tissot F, Cordonnier C, Akova M, Calandra T, Ceppi M, Bruzzi P, Viscoli C, L. European Conference on Infections in. Fluoroquinolone prophylaxis in haematological cancer patients with neutropenia: ECIL critical appraisal of previous guidelines. J Infect. 2018;76(1):20–37.</a:t>
+            </a:r>
+            <a:endParaRPr lang="en-US" sz="1100" dirty="0"/>
+          </a:p>
+        </p:txBody>
+      </p:sp>
+      <p:sp>
+        <p:nvSpPr>
+          <p:cNvPr id="6" name="Text 90"/>
           <p:cNvSpPr txBox="1"/>
           <p:nvPr/>
         </p:nvSpPr>
@@ -15575,7 +15483,7 @@
                   <a:schemeClr val="tx1"/>
                 </a:solidFill>
               </a:rPr>
-              <a:t>10. Averbuch D, Tridello G, Hoek J, et al. Antimicrobial resistance in gram-negative rods causing bacteremia in hematopoietic stem cell transplant recipients: intercontinental prospective study of the infectious diseases working Party of the European Bone Marrow Transplantation Group. Clin Infect Dis. 2017;65(11):1819–28.</a:t>
+              <a:t>12. Bergeron A, Mikulska M, De Greef J, et al. Mycobacterial infections in adults with haematological malignancies and haematopoietic stem cell transplants: guidelines from the 8th European conference on infections in Leukaemia. Lancet Infect Dis. 2022 Dec;22:e359–69.</a:t>
             </a:r>
             <a:endParaRPr lang="en-US" sz="1100" dirty="0"/>
           </a:p>
@@ -15592,7 +15500,7 @@
                   <a:schemeClr val="tx1"/>
                 </a:solidFill>
               </a:rPr>
-              <a:t>11. Mikulska M, Averbuch D, Tissot F, Cordonnier C, Akova M, Calandra T, Ceppi M, Bruzzi P, Viscoli C, L. European Conference on Infections in. Fluoroquinolone prophylaxis in haematological cancer patients with neutropenia: ECIL critical appraisal of previous guidelines. J Infect. 2018;76(1):20–37.</a:t>
+              <a:t>13. Averbuch D, De Greef J, Duréault A, et al. European Study Group for Nocardia in hematopoietic cell transplantation. Nocardia infections in hematopoietic cell transplant recipients: amulticenter international retrospective study of the infectious diseases working Party of the European Society for blood and marrow transplantation. Clin Infect Dis. 2022a;75:88–97.</a:t>
             </a:r>
             <a:endParaRPr lang="en-US" sz="1100" dirty="0"/>
           </a:p>
@@ -15609,7 +15517,7 @@
                   <a:schemeClr val="tx1"/>
                 </a:solidFill>
               </a:rPr>
-              <a:t>12. Bergeron A, Mikulska M, De Greef J, et al. Mycobacterial infections in adults with haematological malignancies and haematopoietic stem cell transplants: guidelines from the 8th European conference on infections in Leukaemia. Lancet Infect Dis. 2022 Dec;22:e359–69.</a:t>
+              <a:t>14. Averbuch D, Tridello G, Wendel L, et al. Listeria infection in hematopoietic cell transplant recipients: an international case-control study of the Infectious Diseases Working Party of the EBMT. The 48th Annual Meeting of the European Society for Blood and Marrow Transplantation: Physicians—Oral Sessions (O009-O155). Bone Marrow Transplant. 2022b;57(Suppl 1):16–99. https://doi.org/10.1038/s41409-022-01815-2.</a:t>
             </a:r>
             <a:endParaRPr lang="en-US" sz="1100" dirty="0"/>
           </a:p>
@@ -15747,7 +15655,7 @@
                   <a:schemeClr val="tx1"/>
                 </a:solidFill>
               </a:rPr>
-              <a:t>REFERENCES</a:t>
+              <a:t>BACKUP · NEUTROPENIC FEVER · DIFFERENTIAL</a:t>
             </a:r>
             <a:endParaRPr lang="en-US" sz="1100" dirty="0"/>
           </a:p>
@@ -15785,7 +15693,7 @@
                   <a:schemeClr val="tx1"/>
                 </a:solidFill>
               </a:rPr>
-              <a:t>References, part 3 of 3</a:t>
+              <a:t>Neutropenic fever has many non-bacterial causes</a:t>
             </a:r>
             <a:endParaRPr lang="en-US" sz="3600" dirty="0"/>
           </a:p>
@@ -15793,85 +15701,7 @@
       </p:sp>
       <p:sp>
         <p:nvSpPr>
-          <p:cNvPr id="5" name="Text 92"/>
-          <p:cNvSpPr txBox="1"/>
-          <p:nvPr/>
-        </p:nvSpPr>
-        <p:spPr>
-          <a:xfrm>
-            <a:off x="685800" y="2103120"/>
-            <a:ext cx="5120640" cy="3886200"/>
-          </a:xfrm>
-          <a:prstGeom prst="rect">
-            <a:avLst/>
-          </a:prstGeom>
-          <a:noFill/>
-          <a:ln/>
-        </p:spPr>
-        <p:txBody>
-          <a:bodyPr wrap="square" lIns="0" tIns="0" rIns="0" bIns="0" rtlCol="0" anchor="t"/>
-          <a:lstStyle/>
-          <a:p>
-            <a:pPr indent="0" marL="0">
-              <a:spcAft>
-                <a:spcPts val="700"/>
-              </a:spcAft>
-              <a:buNone/>
-            </a:pPr>
-            <a:r>
-              <a:rPr lang="en-US" sz="1100" dirty="0">
-                <a:solidFill>
-                  <a:schemeClr val="tx1"/>
-                </a:solidFill>
-              </a:rPr>
-              <a:t>13. Averbuch D, De Greef J, Duréault A, et al. European Study Group for Nocardia in hematopoietic cell transplantation. Nocardia infections in hematopoietic cell transplant recipients: amulticenter international retrospective study of the infectious diseases working Party of the European Society for blood and marrow transplantation. Clin Infect Dis. 2022a;75:88–97.</a:t>
-            </a:r>
-            <a:endParaRPr lang="en-US" sz="1100" dirty="0"/>
-          </a:p>
-        </p:txBody>
-      </p:sp>
-      <p:sp>
-        <p:nvSpPr>
-          <p:cNvPr id="6" name="Text 93"/>
-          <p:cNvSpPr txBox="1"/>
-          <p:nvPr/>
-        </p:nvSpPr>
-        <p:spPr>
-          <a:xfrm>
-            <a:off x="6400800" y="2103120"/>
-            <a:ext cx="5120640" cy="3886200"/>
-          </a:xfrm>
-          <a:prstGeom prst="rect">
-            <a:avLst/>
-          </a:prstGeom>
-          <a:noFill/>
-          <a:ln/>
-        </p:spPr>
-        <p:txBody>
-          <a:bodyPr wrap="square" lIns="0" tIns="0" rIns="0" bIns="0" rtlCol="0" anchor="t"/>
-          <a:lstStyle/>
-          <a:p>
-            <a:pPr indent="0" marL="0">
-              <a:spcAft>
-                <a:spcPts val="700"/>
-              </a:spcAft>
-              <a:buNone/>
-            </a:pPr>
-            <a:r>
-              <a:rPr lang="en-US" sz="1100" dirty="0">
-                <a:solidFill>
-                  <a:schemeClr val="tx1"/>
-                </a:solidFill>
-              </a:rPr>
-              <a:t>14. Averbuch D, Tridello G, Wendel L, et al. Listeria infection in hematopoietic cell transplant recipients: an international case-control study of the Infectious Diseases Working Party of the EBMT. The 48th Annual Meeting of the European Society for Blood and Marrow Transplantation: Physicians—Oral Sessions (O009-O155). Bone Marrow Transplant. 2022b;57(Suppl 1):16–99. https://doi.org/10.1038/s41409-022-01815-2.</a:t>
-            </a:r>
-            <a:endParaRPr lang="en-US" sz="1100" dirty="0"/>
-          </a:p>
-        </p:txBody>
-      </p:sp>
-      <p:sp>
-        <p:nvSpPr>
-          <p:cNvPr id="7" name="Text 0"/>
+          <p:cNvPr id="4" name="Text 0"/>
           <p:cNvSpPr/>
           <p:nvPr>
             <p:ph idx="102" type="body" hasCustomPrompt="1"/>
@@ -15895,7 +15725,339 @@
             <a:pPr algn="l" indent="0" marL="0">
               <a:buNone/>
             </a:pPr>
+            <a:r>
+              <a:rPr lang="en-US" sz="1000" dirty="0">
+                <a:solidFill>
+                  <a:schemeClr val="tx1"/>
+                </a:solidFill>
+              </a:rPr>
+              <a:t>Mikulska M. EBMT Handbook 8th ed. 2024; Ch. 35</a:t>
+            </a:r>
             <a:endParaRPr lang="en-US" sz="1000" dirty="0"/>
+          </a:p>
+        </p:txBody>
+      </p:sp>
+      <p:sp>
+        <p:nvSpPr>
+          <p:cNvPr id="6" name="Text 91"/>
+          <p:cNvSpPr txBox="1"/>
+          <p:nvPr/>
+        </p:nvSpPr>
+        <p:spPr>
+          <a:xfrm>
+            <a:off x="685800" y="2240280"/>
+            <a:ext cx="5180076" cy="457200"/>
+          </a:xfrm>
+          <a:prstGeom prst="rect">
+            <a:avLst/>
+          </a:prstGeom>
+          <a:noFill/>
+          <a:ln/>
+        </p:spPr>
+        <p:txBody>
+          <a:bodyPr wrap="square" lIns="0" tIns="0" rIns="0" bIns="0" rtlCol="0" anchor="t"/>
+          <a:lstStyle/>
+          <a:p>
+            <a:pPr indent="0" marL="0">
+              <a:buNone/>
+            </a:pPr>
+            <a:r>
+              <a:rPr lang="en-US" sz="2000" b="1" dirty="0">
+                <a:solidFill>
+                  <a:schemeClr val="tx1"/>
+                </a:solidFill>
+              </a:rPr>
+              <a:t>Infections beyond bacteria</a:t>
+            </a:r>
+            <a:endParaRPr lang="en-US" sz="2000" dirty="0"/>
+          </a:p>
+        </p:txBody>
+      </p:sp>
+      <p:sp>
+        <p:nvSpPr>
+          <p:cNvPr id="7" name="Shape 4"/>
+          <p:cNvSpPr/>
+          <p:nvPr/>
+        </p:nvSpPr>
+        <p:spPr>
+          <a:xfrm>
+            <a:off x="685800" y="2743200"/>
+            <a:ext cx="5180076" cy="0"/>
+          </a:xfrm>
+          <a:prstGeom prst="line">
+            <a:avLst/>
+          </a:prstGeom>
+          <a:noFill/>
+          <a:ln w="15875">
+            <a:solidFill>
+              <a:schemeClr val="tx1"/>
+            </a:solidFill>
+            <a:prstDash val="solid"/>
+          </a:ln>
+        </p:spPr>
+      </p:sp>
+      <p:sp>
+        <p:nvSpPr>
+          <p:cNvPr id="8" name="Text 92"/>
+          <p:cNvSpPr txBox="1"/>
+          <p:nvPr/>
+        </p:nvSpPr>
+        <p:spPr>
+          <a:xfrm>
+            <a:off x="685800" y="2880360"/>
+            <a:ext cx="5180076" cy="3017520"/>
+          </a:xfrm>
+          <a:prstGeom prst="rect">
+            <a:avLst/>
+          </a:prstGeom>
+          <a:noFill/>
+          <a:ln/>
+        </p:spPr>
+        <p:txBody>
+          <a:bodyPr wrap="square" lIns="0" tIns="0" rIns="0" bIns="0" rtlCol="0" anchor="t"/>
+          <a:lstStyle/>
+          <a:p>
+            <a:pPr marL="342900" indent="-342900">
+              <a:spcAft>
+                <a:spcPts val="800"/>
+              </a:spcAft>
+              <a:buSzPct val="100000"/>
+              <a:buChar char="•"/>
+            </a:pPr>
+            <a:r>
+              <a:rPr lang="en-US" sz="1800" dirty="0">
+                <a:solidFill>
+                  <a:schemeClr val="tx1"/>
+                </a:solidFill>
+              </a:rPr>
+              <a:t>Viral infections (CMV, ADV, respiratory)</a:t>
+            </a:r>
+            <a:endParaRPr lang="en-US" sz="1800" dirty="0"/>
+          </a:p>
+          <a:p>
+            <a:pPr marL="342900" indent="-342900">
+              <a:spcAft>
+                <a:spcPts val="800"/>
+              </a:spcAft>
+              <a:buSzPct val="100000"/>
+              <a:buChar char="•"/>
+            </a:pPr>
+            <a:r>
+              <a:rPr lang="en-US" sz="1800" dirty="0">
+                <a:solidFill>
+                  <a:schemeClr val="tx1"/>
+                </a:solidFill>
+              </a:rPr>
+              <a:t>Fungal infections</a:t>
+            </a:r>
+            <a:endParaRPr lang="en-US" sz="1800" dirty="0"/>
+          </a:p>
+          <a:p>
+            <a:pPr marL="342900" indent="-342900">
+              <a:spcAft>
+                <a:spcPts val="800"/>
+              </a:spcAft>
+              <a:buSzPct val="100000"/>
+              <a:buChar char="•"/>
+            </a:pPr>
+            <a:r>
+              <a:rPr lang="en-US" sz="1800" dirty="0">
+                <a:solidFill>
+                  <a:schemeClr val="tx1"/>
+                </a:solidFill>
+              </a:rPr>
+              <a:t>Legionella, mycobacteria, Nocardia</a:t>
+            </a:r>
+            <a:endParaRPr lang="en-US" sz="1800" dirty="0"/>
+          </a:p>
+          <a:p>
+            <a:pPr marL="342900" indent="-342900">
+              <a:spcAft>
+                <a:spcPts val="800"/>
+              </a:spcAft>
+              <a:buSzPct val="100000"/>
+              <a:buChar char="•"/>
+            </a:pPr>
+            <a:r>
+              <a:rPr lang="en-US" sz="1800" dirty="0">
+                <a:solidFill>
+                  <a:schemeClr val="tx1"/>
+                </a:solidFill>
+              </a:rPr>
+              <a:t>Toxoplasma</a:t>
+            </a:r>
+            <a:endParaRPr lang="en-US" sz="1800" dirty="0"/>
+          </a:p>
+        </p:txBody>
+      </p:sp>
+      <p:sp>
+        <p:nvSpPr>
+          <p:cNvPr id="9" name="Text 93"/>
+          <p:cNvSpPr txBox="1"/>
+          <p:nvPr/>
+        </p:nvSpPr>
+        <p:spPr>
+          <a:xfrm>
+            <a:off x="6323076" y="2240280"/>
+            <a:ext cx="5180076" cy="457200"/>
+          </a:xfrm>
+          <a:prstGeom prst="rect">
+            <a:avLst/>
+          </a:prstGeom>
+          <a:noFill/>
+          <a:ln/>
+        </p:spPr>
+        <p:txBody>
+          <a:bodyPr wrap="square" lIns="0" tIns="0" rIns="0" bIns="0" rtlCol="0" anchor="t"/>
+          <a:lstStyle/>
+          <a:p>
+            <a:pPr indent="0" marL="0">
+              <a:buNone/>
+            </a:pPr>
+            <a:r>
+              <a:rPr lang="en-US" sz="2000" b="1" dirty="0">
+                <a:solidFill>
+                  <a:schemeClr val="tx1"/>
+                </a:solidFill>
+              </a:rPr>
+              <a:t>Non-infectious causes</a:t>
+            </a:r>
+            <a:endParaRPr lang="en-US" sz="2000" dirty="0"/>
+          </a:p>
+        </p:txBody>
+      </p:sp>
+      <p:sp>
+        <p:nvSpPr>
+          <p:cNvPr id="10" name="Shape 7"/>
+          <p:cNvSpPr/>
+          <p:nvPr/>
+        </p:nvSpPr>
+        <p:spPr>
+          <a:xfrm>
+            <a:off x="6323076" y="2743200"/>
+            <a:ext cx="5180076" cy="0"/>
+          </a:xfrm>
+          <a:prstGeom prst="line">
+            <a:avLst/>
+          </a:prstGeom>
+          <a:noFill/>
+          <a:ln w="15875">
+            <a:solidFill>
+              <a:schemeClr val="tx1"/>
+            </a:solidFill>
+            <a:prstDash val="solid"/>
+          </a:ln>
+        </p:spPr>
+      </p:sp>
+      <p:sp>
+        <p:nvSpPr>
+          <p:cNvPr id="11" name="Text 94"/>
+          <p:cNvSpPr txBox="1"/>
+          <p:nvPr/>
+        </p:nvSpPr>
+        <p:spPr>
+          <a:xfrm>
+            <a:off x="6323076" y="2880360"/>
+            <a:ext cx="5180076" cy="3017520"/>
+          </a:xfrm>
+          <a:prstGeom prst="rect">
+            <a:avLst/>
+          </a:prstGeom>
+          <a:noFill/>
+          <a:ln/>
+        </p:spPr>
+        <p:txBody>
+          <a:bodyPr wrap="square" lIns="0" tIns="0" rIns="0" bIns="0" rtlCol="0" anchor="t"/>
+          <a:lstStyle/>
+          <a:p>
+            <a:pPr marL="342900" indent="-342900">
+              <a:spcAft>
+                <a:spcPts val="800"/>
+              </a:spcAft>
+              <a:buSzPct val="100000"/>
+              <a:buChar char="•"/>
+            </a:pPr>
+            <a:r>
+              <a:rPr lang="en-US" sz="1800" dirty="0">
+                <a:solidFill>
+                  <a:schemeClr val="tx1"/>
+                </a:solidFill>
+              </a:rPr>
+              <a:t>Drug (ATG) or transfusion reaction</a:t>
+            </a:r>
+            <a:endParaRPr lang="en-US" sz="1800" dirty="0"/>
+          </a:p>
+          <a:p>
+            <a:pPr marL="342900" indent="-342900">
+              <a:spcAft>
+                <a:spcPts val="800"/>
+              </a:spcAft>
+              <a:buSzPct val="100000"/>
+              <a:buChar char="•"/>
+            </a:pPr>
+            <a:r>
+              <a:rPr lang="en-US" sz="1800" dirty="0">
+                <a:solidFill>
+                  <a:schemeClr val="tx1"/>
+                </a:solidFill>
+              </a:rPr>
+              <a:t>CRS, engraftment syndrome</a:t>
+            </a:r>
+            <a:endParaRPr lang="en-US" sz="1800" dirty="0"/>
+          </a:p>
+          <a:p>
+            <a:pPr marL="342900" indent="-342900">
+              <a:spcAft>
+                <a:spcPts val="800"/>
+              </a:spcAft>
+              <a:buSzPct val="100000"/>
+              <a:buChar char="•"/>
+            </a:pPr>
+            <a:r>
+              <a:rPr lang="en-US" sz="1800" dirty="0">
+                <a:solidFill>
+                  <a:schemeClr val="tx1"/>
+                </a:solidFill>
+              </a:rPr>
+              <a:t>Mucositis</a:t>
+            </a:r>
+            <a:endParaRPr lang="en-US" sz="1800" dirty="0"/>
+          </a:p>
+          <a:p>
+            <a:pPr marL="342900" indent="-342900">
+              <a:spcAft>
+                <a:spcPts val="800"/>
+              </a:spcAft>
+              <a:buSzPct val="100000"/>
+              <a:buChar char="•"/>
+            </a:pPr>
+            <a:r>
+              <a:rPr lang="en-US" sz="1800" dirty="0">
+                <a:solidFill>
+                  <a:schemeClr val="tx1"/>
+                </a:solidFill>
+              </a:rPr>
+              <a:t>GVHD, rejection, haemophagocytosis</a:t>
+            </a:r>
+            <a:endParaRPr lang="en-US" sz="1800" dirty="0"/>
+          </a:p>
+          <a:p>
+            <a:pPr marL="342900" indent="-342900">
+              <a:spcAft>
+                <a:spcPts val="800"/>
+              </a:spcAft>
+              <a:buSzPct val="100000"/>
+              <a:buChar char="•"/>
+            </a:pPr>
+            <a:r>
+              <a:rPr lang="en-US" sz="1800" dirty="0">
+                <a:solidFill>
+                  <a:schemeClr val="tx1"/>
+                </a:solidFill>
+              </a:rPr>
+              <a:t>Underlying disease</a:t>
+            </a:r>
+            <a:endParaRPr lang="en-US" sz="1800" dirty="0"/>
           </a:p>
         </p:txBody>
       </p:sp>
@@ -16001,7 +16163,7 @@
                   <a:schemeClr val="tx1"/>
                 </a:solidFill>
               </a:rPr>
-              <a:t>BACKUP · NEUTROPENIC FEVER · DIFFERENTIAL</a:t>
+              <a:t>BACKUP · BACTERIAL INFECTIONS · SYNDROMES</a:t>
             </a:r>
             <a:endParaRPr lang="en-US" sz="1100" dirty="0"/>
           </a:p>
@@ -16039,7 +16201,7 @@
                   <a:schemeClr val="tx1"/>
                 </a:solidFill>
               </a:rPr>
-              <a:t>Neutropenic fever has many non-bacterial causes</a:t>
+              <a:t>Pneumonia, diarrhoea and CNS infection each have a rule</a:t>
             </a:r>
             <a:endParaRPr lang="en-US" sz="3600" dirty="0"/>
           </a:p>
@@ -16077,514 +16239,6 @@
                   <a:schemeClr val="tx1"/>
                 </a:solidFill>
               </a:rPr>
-              <a:t>Mikulska M. EBMT Handbook 8th ed. 2024; Ch. 35</a:t>
-            </a:r>
-            <a:endParaRPr lang="en-US" sz="1000" dirty="0"/>
-          </a:p>
-        </p:txBody>
-      </p:sp>
-      <p:sp>
-        <p:nvSpPr>
-          <p:cNvPr id="6" name="Text 94"/>
-          <p:cNvSpPr txBox="1"/>
-          <p:nvPr/>
-        </p:nvSpPr>
-        <p:spPr>
-          <a:xfrm>
-            <a:off x="685800" y="2240280"/>
-            <a:ext cx="5180076" cy="457200"/>
-          </a:xfrm>
-          <a:prstGeom prst="rect">
-            <a:avLst/>
-          </a:prstGeom>
-          <a:noFill/>
-          <a:ln/>
-        </p:spPr>
-        <p:txBody>
-          <a:bodyPr wrap="square" lIns="0" tIns="0" rIns="0" bIns="0" rtlCol="0" anchor="t"/>
-          <a:lstStyle/>
-          <a:p>
-            <a:pPr indent="0" marL="0">
-              <a:buNone/>
-            </a:pPr>
-            <a:r>
-              <a:rPr lang="en-US" sz="2000" b="1" dirty="0">
-                <a:solidFill>
-                  <a:schemeClr val="tx1"/>
-                </a:solidFill>
-              </a:rPr>
-              <a:t>Infections beyond bacteria</a:t>
-            </a:r>
-            <a:endParaRPr lang="en-US" sz="2000" dirty="0"/>
-          </a:p>
-        </p:txBody>
-      </p:sp>
-      <p:sp>
-        <p:nvSpPr>
-          <p:cNvPr id="7" name="Shape 4"/>
-          <p:cNvSpPr/>
-          <p:nvPr/>
-        </p:nvSpPr>
-        <p:spPr>
-          <a:xfrm>
-            <a:off x="685800" y="2743200"/>
-            <a:ext cx="5180076" cy="0"/>
-          </a:xfrm>
-          <a:prstGeom prst="line">
-            <a:avLst/>
-          </a:prstGeom>
-          <a:noFill/>
-          <a:ln w="15875">
-            <a:solidFill>
-              <a:schemeClr val="tx1"/>
-            </a:solidFill>
-            <a:prstDash val="solid"/>
-          </a:ln>
-        </p:spPr>
-      </p:sp>
-      <p:sp>
-        <p:nvSpPr>
-          <p:cNvPr id="8" name="Text 95"/>
-          <p:cNvSpPr txBox="1"/>
-          <p:nvPr/>
-        </p:nvSpPr>
-        <p:spPr>
-          <a:xfrm>
-            <a:off x="685800" y="2880360"/>
-            <a:ext cx="5180076" cy="3017520"/>
-          </a:xfrm>
-          <a:prstGeom prst="rect">
-            <a:avLst/>
-          </a:prstGeom>
-          <a:noFill/>
-          <a:ln/>
-        </p:spPr>
-        <p:txBody>
-          <a:bodyPr wrap="square" lIns="0" tIns="0" rIns="0" bIns="0" rtlCol="0" anchor="t"/>
-          <a:lstStyle/>
-          <a:p>
-            <a:pPr marL="342900" indent="-342900">
-              <a:spcAft>
-                <a:spcPts val="800"/>
-              </a:spcAft>
-              <a:buSzPct val="100000"/>
-              <a:buChar char="•"/>
-            </a:pPr>
-            <a:r>
-              <a:rPr lang="en-US" sz="1800" dirty="0">
-                <a:solidFill>
-                  <a:schemeClr val="tx1"/>
-                </a:solidFill>
-              </a:rPr>
-              <a:t>Viral infections (CMV, ADV, respiratory)</a:t>
-            </a:r>
-            <a:endParaRPr lang="en-US" sz="1800" dirty="0"/>
-          </a:p>
-          <a:p>
-            <a:pPr marL="342900" indent="-342900">
-              <a:spcAft>
-                <a:spcPts val="800"/>
-              </a:spcAft>
-              <a:buSzPct val="100000"/>
-              <a:buChar char="•"/>
-            </a:pPr>
-            <a:r>
-              <a:rPr lang="en-US" sz="1800" dirty="0">
-                <a:solidFill>
-                  <a:schemeClr val="tx1"/>
-                </a:solidFill>
-              </a:rPr>
-              <a:t>Fungal infections</a:t>
-            </a:r>
-            <a:endParaRPr lang="en-US" sz="1800" dirty="0"/>
-          </a:p>
-          <a:p>
-            <a:pPr marL="342900" indent="-342900">
-              <a:spcAft>
-                <a:spcPts val="800"/>
-              </a:spcAft>
-              <a:buSzPct val="100000"/>
-              <a:buChar char="•"/>
-            </a:pPr>
-            <a:r>
-              <a:rPr lang="en-US" sz="1800" dirty="0">
-                <a:solidFill>
-                  <a:schemeClr val="tx1"/>
-                </a:solidFill>
-              </a:rPr>
-              <a:t>Legionella, mycobacteria, Nocardia</a:t>
-            </a:r>
-            <a:endParaRPr lang="en-US" sz="1800" dirty="0"/>
-          </a:p>
-          <a:p>
-            <a:pPr marL="342900" indent="-342900">
-              <a:spcAft>
-                <a:spcPts val="800"/>
-              </a:spcAft>
-              <a:buSzPct val="100000"/>
-              <a:buChar char="•"/>
-            </a:pPr>
-            <a:r>
-              <a:rPr lang="en-US" sz="1800" dirty="0">
-                <a:solidFill>
-                  <a:schemeClr val="tx1"/>
-                </a:solidFill>
-              </a:rPr>
-              <a:t>Toxoplasma</a:t>
-            </a:r>
-            <a:endParaRPr lang="en-US" sz="1800" dirty="0"/>
-          </a:p>
-        </p:txBody>
-      </p:sp>
-      <p:sp>
-        <p:nvSpPr>
-          <p:cNvPr id="9" name="Text 96"/>
-          <p:cNvSpPr txBox="1"/>
-          <p:nvPr/>
-        </p:nvSpPr>
-        <p:spPr>
-          <a:xfrm>
-            <a:off x="6323076" y="2240280"/>
-            <a:ext cx="5180076" cy="457200"/>
-          </a:xfrm>
-          <a:prstGeom prst="rect">
-            <a:avLst/>
-          </a:prstGeom>
-          <a:noFill/>
-          <a:ln/>
-        </p:spPr>
-        <p:txBody>
-          <a:bodyPr wrap="square" lIns="0" tIns="0" rIns="0" bIns="0" rtlCol="0" anchor="t"/>
-          <a:lstStyle/>
-          <a:p>
-            <a:pPr indent="0" marL="0">
-              <a:buNone/>
-            </a:pPr>
-            <a:r>
-              <a:rPr lang="en-US" sz="2000" b="1" dirty="0">
-                <a:solidFill>
-                  <a:schemeClr val="tx1"/>
-                </a:solidFill>
-              </a:rPr>
-              <a:t>Non-infectious causes</a:t>
-            </a:r>
-            <a:endParaRPr lang="en-US" sz="2000" dirty="0"/>
-          </a:p>
-        </p:txBody>
-      </p:sp>
-      <p:sp>
-        <p:nvSpPr>
-          <p:cNvPr id="10" name="Shape 7"/>
-          <p:cNvSpPr/>
-          <p:nvPr/>
-        </p:nvSpPr>
-        <p:spPr>
-          <a:xfrm>
-            <a:off x="6323076" y="2743200"/>
-            <a:ext cx="5180076" cy="0"/>
-          </a:xfrm>
-          <a:prstGeom prst="line">
-            <a:avLst/>
-          </a:prstGeom>
-          <a:noFill/>
-          <a:ln w="15875">
-            <a:solidFill>
-              <a:schemeClr val="tx1"/>
-            </a:solidFill>
-            <a:prstDash val="solid"/>
-          </a:ln>
-        </p:spPr>
-      </p:sp>
-      <p:sp>
-        <p:nvSpPr>
-          <p:cNvPr id="11" name="Text 97"/>
-          <p:cNvSpPr txBox="1"/>
-          <p:nvPr/>
-        </p:nvSpPr>
-        <p:spPr>
-          <a:xfrm>
-            <a:off x="6323076" y="2880360"/>
-            <a:ext cx="5180076" cy="3017520"/>
-          </a:xfrm>
-          <a:prstGeom prst="rect">
-            <a:avLst/>
-          </a:prstGeom>
-          <a:noFill/>
-          <a:ln/>
-        </p:spPr>
-        <p:txBody>
-          <a:bodyPr wrap="square" lIns="0" tIns="0" rIns="0" bIns="0" rtlCol="0" anchor="t"/>
-          <a:lstStyle/>
-          <a:p>
-            <a:pPr marL="342900" indent="-342900">
-              <a:spcAft>
-                <a:spcPts val="800"/>
-              </a:spcAft>
-              <a:buSzPct val="100000"/>
-              <a:buChar char="•"/>
-            </a:pPr>
-            <a:r>
-              <a:rPr lang="en-US" sz="1800" dirty="0">
-                <a:solidFill>
-                  <a:schemeClr val="tx1"/>
-                </a:solidFill>
-              </a:rPr>
-              <a:t>Drug (ATG) or transfusion reaction</a:t>
-            </a:r>
-            <a:endParaRPr lang="en-US" sz="1800" dirty="0"/>
-          </a:p>
-          <a:p>
-            <a:pPr marL="342900" indent="-342900">
-              <a:spcAft>
-                <a:spcPts val="800"/>
-              </a:spcAft>
-              <a:buSzPct val="100000"/>
-              <a:buChar char="•"/>
-            </a:pPr>
-            <a:r>
-              <a:rPr lang="en-US" sz="1800" dirty="0">
-                <a:solidFill>
-                  <a:schemeClr val="tx1"/>
-                </a:solidFill>
-              </a:rPr>
-              <a:t>CRS, engraftment syndrome</a:t>
-            </a:r>
-            <a:endParaRPr lang="en-US" sz="1800" dirty="0"/>
-          </a:p>
-          <a:p>
-            <a:pPr marL="342900" indent="-342900">
-              <a:spcAft>
-                <a:spcPts val="800"/>
-              </a:spcAft>
-              <a:buSzPct val="100000"/>
-              <a:buChar char="•"/>
-            </a:pPr>
-            <a:r>
-              <a:rPr lang="en-US" sz="1800" dirty="0">
-                <a:solidFill>
-                  <a:schemeClr val="tx1"/>
-                </a:solidFill>
-              </a:rPr>
-              <a:t>Mucositis</a:t>
-            </a:r>
-            <a:endParaRPr lang="en-US" sz="1800" dirty="0"/>
-          </a:p>
-          <a:p>
-            <a:pPr marL="342900" indent="-342900">
-              <a:spcAft>
-                <a:spcPts val="800"/>
-              </a:spcAft>
-              <a:buSzPct val="100000"/>
-              <a:buChar char="•"/>
-            </a:pPr>
-            <a:r>
-              <a:rPr lang="en-US" sz="1800" dirty="0">
-                <a:solidFill>
-                  <a:schemeClr val="tx1"/>
-                </a:solidFill>
-              </a:rPr>
-              <a:t>GVHD, rejection, haemophagocytosis</a:t>
-            </a:r>
-            <a:endParaRPr lang="en-US" sz="1800" dirty="0"/>
-          </a:p>
-          <a:p>
-            <a:pPr marL="342900" indent="-342900">
-              <a:spcAft>
-                <a:spcPts val="800"/>
-              </a:spcAft>
-              <a:buSzPct val="100000"/>
-              <a:buChar char="•"/>
-            </a:pPr>
-            <a:r>
-              <a:rPr lang="en-US" sz="1800" dirty="0">
-                <a:solidFill>
-                  <a:schemeClr val="tx1"/>
-                </a:solidFill>
-              </a:rPr>
-              <a:t>Underlying disease</a:t>
-            </a:r>
-            <a:endParaRPr lang="en-US" sz="1800" dirty="0"/>
-          </a:p>
-        </p:txBody>
-      </p:sp>
-      <p:sp>
-        <p:nvSpPr>
-          <p:cNvPr id="25" name="Slide Number Placeholder 0"/>
-          <p:cNvSpPr>
-            <a:spLocks noGrp="1"/>
-          </p:cNvSpPr>
-          <p:nvPr>
-            <p:ph type="sldNum" sz="quarter" idx="4294967295"/>
-          </p:nvPr>
-        </p:nvSpPr>
-        <p:spPr>
-          <a:xfrm>
-            <a:off x="10972800" y="6080760"/>
-            <a:ext cx="530352" cy="274320"/>
-          </a:xfrm>
-          <a:prstGeom prst="rect">
-            <a:avLst/>
-          </a:prstGeom>
-          <a:extLst>
-            <a:ext uri="{C572A759-6A51-4108-AA02-DFA0A04FC94B}">
-              <ma14:wrappingTextBoxFlag xmlns:ma14="http://schemas.microsoft.com/office/mac/drawingml/2011/main" val="0"/>
-            </a:ext>
-          </a:extLst>
-        </p:spPr>
-        <p:txBody>
-          <a:bodyPr/>
-          <a:lstStyle>
-            <a:lvl1pPr>
-              <a:defRPr sz="1000">
-                <a:solidFill>
-                  <a:schemeClr val="tx1"/>
-                </a:solidFill>
-              </a:defRPr>
-            </a:lvl1pPr>
-          </a:lstStyle>
-          <a:p>
-            <a:pPr algn="r"/>
-            <a:fld id="{F7021451-1387-4CA6-816F-3879F97B5CBC}" type="slidenum">
-              <a:rPr b="0" lang="en-US"/>
-              <a:t>26</a:t>
-            </a:fld>
-            <a:endParaRPr lang="en-US"/>
-          </a:p>
-        </p:txBody>
-      </p:sp>
-    </p:spTree>
-  </p:cSld>
-  <p:clrMapOvr>
-    <a:masterClrMapping/>
-  </p:clrMapOvr>
-</p:sld>
-</file>
-
-<file path=ppt/slides/slide27.xml><?xml version="1.0" encoding="utf-8"?>
-<p:sld xmlns:a="http://schemas.openxmlformats.org/drawingml/2006/main" xmlns:r="http://schemas.openxmlformats.org/officeDocument/2006/relationships" xmlns:p="http://schemas.openxmlformats.org/presentationml/2006/main">
-  <p:cSld name="Slide 27">
-    <p:spTree>
-      <p:nvGrpSpPr>
-        <p:cNvPr id="1" name=""/>
-        <p:cNvGrpSpPr/>
-        <p:nvPr/>
-      </p:nvGrpSpPr>
-      <p:grpSpPr>
-        <a:xfrm>
-          <a:off x="0" y="0"/>
-          <a:ext cx="0" cy="0"/>
-          <a:chOff x="0" y="0"/>
-          <a:chExt cx="0" cy="0"/>
-        </a:xfrm>
-      </p:grpSpPr>
-      <p:sp>
-        <p:nvSpPr>
-          <p:cNvPr id="2" name="Text 0"/>
-          <p:cNvSpPr/>
-          <p:nvPr>
-            <p:ph idx="100" type="body" hasCustomPrompt="1"/>
-          </p:nvPr>
-        </p:nvSpPr>
-        <p:spPr>
-          <a:xfrm>
-            <a:off x="685800" y="502920"/>
-            <a:ext cx="10817352" cy="274320"/>
-          </a:xfrm>
-          <a:prstGeom prst="rect">
-            <a:avLst/>
-          </a:prstGeom>
-          <a:noFill/>
-          <a:ln/>
-        </p:spPr>
-        <p:txBody>
-          <a:bodyPr wrap="square" lIns="0" tIns="0" rIns="0" bIns="0" rtlCol="0" anchor="t"/>
-          <a:lstStyle/>
-          <a:p>
-            <a:pPr algn="l" indent="0" marL="0">
-              <a:buNone/>
-            </a:pPr>
-            <a:r>
-              <a:rPr lang="en-US" sz="1100" spc="300" kern="0" dirty="0">
-                <a:solidFill>
-                  <a:schemeClr val="tx1"/>
-                </a:solidFill>
-              </a:rPr>
-              <a:t>BACKUP · BACTERIAL INFECTIONS · SYNDROMES</a:t>
-            </a:r>
-            <a:endParaRPr lang="en-US" sz="1100" dirty="0"/>
-          </a:p>
-        </p:txBody>
-      </p:sp>
-      <p:sp>
-        <p:nvSpPr>
-          <p:cNvPr id="3" name="Text 0"/>
-          <p:cNvSpPr/>
-          <p:nvPr>
-            <p:ph idx="101" type="title" hasCustomPrompt="1"/>
-          </p:nvPr>
-        </p:nvSpPr>
-        <p:spPr>
-          <a:xfrm>
-            <a:off x="685800" y="822960"/>
-            <a:ext cx="10817352" cy="1143000"/>
-          </a:xfrm>
-          <a:prstGeom prst="rect">
-            <a:avLst/>
-          </a:prstGeom>
-          <a:noFill/>
-          <a:ln/>
-        </p:spPr>
-        <p:txBody>
-          <a:bodyPr wrap="square" lIns="0" tIns="0" rIns="0" bIns="0" rtlCol="0" anchor="t"/>
-          <a:lstStyle/>
-          <a:p>
-            <a:pPr algn="l" indent="0" marL="0">
-              <a:buNone/>
-            </a:pPr>
-            <a:r>
-              <a:rPr lang="en-US" sz="3600" b="1" dirty="0">
-                <a:solidFill>
-                  <a:schemeClr val="tx1"/>
-                </a:solidFill>
-              </a:rPr>
-              <a:t>Pneumonia, diarrhoea and CNS infection each have a rule</a:t>
-            </a:r>
-            <a:endParaRPr lang="en-US" sz="3600" dirty="0"/>
-          </a:p>
-        </p:txBody>
-      </p:sp>
-      <p:sp>
-        <p:nvSpPr>
-          <p:cNvPr id="4" name="Text 0"/>
-          <p:cNvSpPr/>
-          <p:nvPr>
-            <p:ph idx="102" type="body" hasCustomPrompt="1"/>
-          </p:nvPr>
-        </p:nvSpPr>
-        <p:spPr>
-          <a:xfrm>
-            <a:off x="685800" y="6080760"/>
-            <a:ext cx="9966960" cy="457200"/>
-          </a:xfrm>
-          <a:prstGeom prst="rect">
-            <a:avLst/>
-          </a:prstGeom>
-          <a:noFill/>
-          <a:ln/>
-        </p:spPr>
-        <p:txBody>
-          <a:bodyPr wrap="square" lIns="0" tIns="0" rIns="0" bIns="0" rtlCol="0" anchor="t"/>
-          <a:lstStyle/>
-          <a:p>
-            <a:pPr algn="l" indent="0" marL="0">
-              <a:buNone/>
-            </a:pPr>
-            <a:r>
-              <a:rPr lang="en-US" sz="1000" dirty="0">
-                <a:solidFill>
-                  <a:schemeClr val="tx1"/>
-                </a:solidFill>
-              </a:rPr>
               <a:t>Averbuch D. EBMT Handbook 8th ed. 2024; Ch. 36</a:t>
             </a:r>
             <a:endParaRPr lang="en-US" sz="1000" dirty="0"/>
@@ -16593,7 +16247,7 @@
       </p:sp>
       <p:graphicFrame>
         <p:nvGraphicFramePr>
-          <p:cNvPr id="28" name="Table 98"/>
+          <p:cNvPr id="27" name="Table 95"/>
           <p:cNvGraphicFramePr>
             <a:graphicFrameLocks noGrp="1"/>
           </p:cNvGraphicFramePr>
@@ -17443,7 +17097,7 @@
             <a:pPr algn="r"/>
             <a:fld id="{F7021451-1387-4CA6-816F-3879F97B5CBC}" type="slidenum">
               <a:rPr b="0" lang="en-US"/>
-              <a:t>27</a:t>
+              <a:t>26</a:t>
             </a:fld>
             <a:endParaRPr lang="en-US"/>
           </a:p>
@@ -17457,9 +17111,9 @@
 </p:sld>
 </file>
 
-<file path=ppt/slides/slide28.xml><?xml version="1.0" encoding="utf-8"?>
+<file path=ppt/slides/slide27.xml><?xml version="1.0" encoding="utf-8"?>
 <p:sld xmlns:a="http://schemas.openxmlformats.org/drawingml/2006/main" xmlns:r="http://schemas.openxmlformats.org/officeDocument/2006/relationships" xmlns:p="http://schemas.openxmlformats.org/presentationml/2006/main">
-  <p:cSld name="Slide 28">
+  <p:cSld name="Slide 27">
     <p:spTree>
       <p:nvGrpSpPr>
         <p:cNvPr id="1" name=""/>
@@ -17590,7 +17244,7 @@
       </p:sp>
       <p:graphicFrame>
         <p:nvGraphicFramePr>
-          <p:cNvPr id="29" name="Table 99"/>
+          <p:cNvPr id="28" name="Table 96"/>
           <p:cNvGraphicFramePr>
             <a:graphicFrameLocks noGrp="1"/>
           </p:cNvGraphicFramePr>
@@ -18161,7 +17815,7 @@
             <a:pPr algn="r"/>
             <a:fld id="{F7021451-1387-4CA6-816F-3879F97B5CBC}" type="slidenum">
               <a:rPr b="0" lang="en-US"/>
-              <a:t>28</a:t>
+              <a:t>27</a:t>
             </a:fld>
             <a:endParaRPr lang="en-US"/>
           </a:p>
@@ -18175,9 +17829,9 @@
 </p:sld>
 </file>
 
-<file path=ppt/slides/slide29.xml><?xml version="1.0" encoding="utf-8"?>
+<file path=ppt/slides/slide28.xml><?xml version="1.0" encoding="utf-8"?>
 <p:sld xmlns:a="http://schemas.openxmlformats.org/drawingml/2006/main" xmlns:r="http://schemas.openxmlformats.org/officeDocument/2006/relationships" xmlns:p="http://schemas.openxmlformats.org/presentationml/2006/main">
-  <p:cSld name="Slide 29">
+  <p:cSld name="Slide 28">
     <p:spTree>
       <p:nvGrpSpPr>
         <p:cNvPr id="1" name=""/>
@@ -18262,7 +17916,7 @@
                   <a:schemeClr val="tx1"/>
                 </a:solidFill>
               </a:rPr>
-              <a:t>Asian series show the highest tuberculosis risk after allo-HCT</a:t>
+              <a:t>Taiwanese series put allo-HCT tuberculosis risk at 7–13 times normal</a:t>
             </a:r>
             <a:endParaRPr lang="en-US" sz="3600" dirty="0"/>
           </a:p>
@@ -18308,7 +17962,7 @@
       </p:sp>
       <p:graphicFrame>
         <p:nvGraphicFramePr>
-          <p:cNvPr id="30" name="Table 100"/>
+          <p:cNvPr id="29" name="Table 97"/>
           <p:cNvGraphicFramePr>
             <a:graphicFrameLocks noGrp="1"/>
           </p:cNvGraphicFramePr>
@@ -19822,7 +19476,7 @@
             <a:pPr algn="r"/>
             <a:fld id="{F7021451-1387-4CA6-816F-3879F97B5CBC}" type="slidenum">
               <a:rPr b="0" lang="en-US"/>
-              <a:t>29</a:t>
+              <a:t>28</a:t>
             </a:fld>
             <a:endParaRPr lang="en-US"/>
           </a:p>

--- a/slides/decks/s10-neutropenic-fever-bacterial.pptx
+++ b/slides/decks/s10-neutropenic-fever-bacterial.pptx
@@ -134,13 +134,13 @@
   <p:extLst>
     <p:ext uri="{521415D9-36F7-43E2-AB2F-B90AF26B5E84}">
       <p14:sectionLst xmlns:p14="http://schemas.microsoft.com/office/powerpoint/2010/main">
-        <p14:section name="Opening" id="{71b2f0eb-35c3-17d3-15b3-78be74174ff7}">
+        <p14:section name="Opening" id="{6c81e94f-0e34-fe2f-6721-37720efeca42}">
           <p14:sldIdLst>
             <p14:sldId id="256"/>
             <p14:sldId id="257"/>
           </p14:sldIdLst>
         </p14:section>
-        <p14:section name="Neutropenic fever" id="{0ac17183-8122-06c1-134c-a672696eb116}">
+        <p14:section name="Neutropenic fever" id="{f3c235fe-b317-5643-ae72-3d3fa0539c9d}">
           <p14:sldIdLst>
             <p14:sldId id="258"/>
             <p14:sldId id="259"/>
@@ -149,7 +149,7 @@
             <p14:sldId id="262"/>
           </p14:sldIdLst>
         </p14:section>
-        <p14:section name="Bacterial infections" id="{9160de3c-65b4-ca58-3c79-5c3c72f898cf}">
+        <p14:section name="Bacterial infections" id="{47514edf-fc4c-b952-6c38-c11c3fc58af3}">
           <p14:sldIdLst>
             <p14:sldId id="263"/>
             <p14:sldId id="264"/>
@@ -159,14 +159,14 @@
             <p14:sldId id="268"/>
           </p14:sldIdLst>
         </p14:section>
-        <p14:section name="Other life-threatening infections" id="{babd1133-0d2a-d6f5-9a5f-2d4c4ac89f83}">
+        <p14:section name="Other life-threatening infections" id="{421cc975-0979-7c92-e552-ed7ae83c4856}">
           <p14:sldIdLst>
             <p14:sldId id="269"/>
             <p14:sldId id="270"/>
             <p14:sldId id="271"/>
           </p14:sldIdLst>
         </p14:section>
-        <p14:section name="Board questions" id="{8f4b7143-47bd-2e4c-86bc-ed8d1d323080}">
+        <p14:section name="Board questions" id="{f745ce57-fcfa-91d7-c187-9a2461ba3958}">
           <p14:sldIdLst>
             <p14:sldId id="272"/>
             <p14:sldId id="273"/>
@@ -176,13 +176,13 @@
             <p14:sldId id="277"/>
           </p14:sldIdLst>
         </p14:section>
-        <p14:section name="References" id="{fa47d299-28a9-32fb-ea17-159fa5a8bfe4}">
+        <p14:section name="References" id="{c967cebf-9712-9309-e7dd-20b63803e22a}">
           <p14:sldIdLst>
             <p14:sldId id="278"/>
             <p14:sldId id="279"/>
           </p14:sldIdLst>
         </p14:section>
-        <p14:section name="Backup" id="{0d27e10d-34ed-1b06-dbc5-6f15c4b5205b}">
+        <p14:section name="Backup" id="{94414b3f-760e-63c0-bf95-e25b7619885d}">
           <p14:sldIdLst>
             <p14:sldId id="280"/>
             <p14:sldId id="281"/>
@@ -713,7 +713,7 @@
             </a:pPr>
             <a:r>
               <a:rPr lang="en-US" dirty="0"/>
-              <a:t>標題的數字來自 EBMT 的多國前瞻性研究裡，一半的 Gram-negative 對 non-carbapenem β-lactam 抗藥，而這正是 febrile neutropenia 的 first-line；18.5% 對 carbapenem 抗藥，35% 是 MDR。Allo 比 auto 高，東南歐比西北歐高。Carbapenem-resistant 的危險因子是同一種菌的 colonisation 或感染、carbapenem 治療中 breakthrough，以及住過 ICU。</a:t>
+              <a:t>標題的數字來自 EBMT 的多國前瞻性研究，一半的 Gram-negative 對 non-carbapenem β-lactam 抗藥，而這正是 febrile neutropenia 的 first-line；18.5% 對 carbapenem 抗藥，35% 是 MDR。Allo 比 auto 高，東南歐比西北歐高。Carbapenem-resistant 的危險因子是同一種菌的 colonisation 或感染、carbapenem 治療中 breakthrough，以及住過 ICU。</a:t>
             </a:r>
           </a:p>
           <a:p>

--- a/slides/decks/s10-neutropenic-fever-bacterial.pptx
+++ b/slides/decks/s10-neutropenic-fever-bacterial.pptx
@@ -134,13 +134,13 @@
   <p:extLst>
     <p:ext uri="{521415D9-36F7-43E2-AB2F-B90AF26B5E84}">
       <p14:sectionLst xmlns:p14="http://schemas.microsoft.com/office/powerpoint/2010/main">
-        <p14:section name="Opening" id="{6c81e94f-0e34-fe2f-6721-37720efeca42}">
+        <p14:section name="Opening" id="{5b07ea46-545d-cb8a-dc56-941734e866d8}">
           <p14:sldIdLst>
             <p14:sldId id="256"/>
             <p14:sldId id="257"/>
           </p14:sldIdLst>
         </p14:section>
-        <p14:section name="Neutropenic fever" id="{f3c235fe-b317-5643-ae72-3d3fa0539c9d}">
+        <p14:section name="Neutropenic fever" id="{ca9aa1d5-193d-ea90-4ca0-55387b097db3}">
           <p14:sldIdLst>
             <p14:sldId id="258"/>
             <p14:sldId id="259"/>
@@ -149,7 +149,7 @@
             <p14:sldId id="262"/>
           </p14:sldIdLst>
         </p14:section>
-        <p14:section name="Bacterial infections" id="{47514edf-fc4c-b952-6c38-c11c3fc58af3}">
+        <p14:section name="Bacterial infections" id="{cc9b1b4f-6ab5-3c9a-749f-e5315c04e116}">
           <p14:sldIdLst>
             <p14:sldId id="263"/>
             <p14:sldId id="264"/>
@@ -159,14 +159,14 @@
             <p14:sldId id="268"/>
           </p14:sldIdLst>
         </p14:section>
-        <p14:section name="Other life-threatening infections" id="{421cc975-0979-7c92-e552-ed7ae83c4856}">
+        <p14:section name="Other life-threatening infections" id="{b7ddf2e7-7170-22dd-c261-0e302b185f4f}">
           <p14:sldIdLst>
             <p14:sldId id="269"/>
             <p14:sldId id="270"/>
             <p14:sldId id="271"/>
           </p14:sldIdLst>
         </p14:section>
-        <p14:section name="Board questions" id="{f745ce57-fcfa-91d7-c187-9a2461ba3958}">
+        <p14:section name="Board questions" id="{7c8db2ca-8a4f-686f-ee27-969457b5532a}">
           <p14:sldIdLst>
             <p14:sldId id="272"/>
             <p14:sldId id="273"/>
@@ -176,13 +176,13 @@
             <p14:sldId id="277"/>
           </p14:sldIdLst>
         </p14:section>
-        <p14:section name="References" id="{c967cebf-9712-9309-e7dd-20b63803e22a}">
+        <p14:section name="References" id="{7ae60869-5ca5-d208-d774-c287359dfe31}">
           <p14:sldIdLst>
             <p14:sldId id="278"/>
             <p14:sldId id="279"/>
           </p14:sldIdLst>
         </p14:section>
-        <p14:section name="Backup" id="{94414b3f-760e-63c0-bf95-e25b7619885d}">
+        <p14:section name="Backup" id="{33dd9f71-916b-9c54-fd3a-8e7abf53e897}">
           <p14:sldIdLst>
             <p14:sldId id="280"/>
             <p14:sldId id="281"/>
